--- a/EcoSort_Pitch.pptx
+++ b/EcoSort_Pitch.pptx
@@ -1,21 +1,21 @@
 
 <file path=ppt/presentation.xml><?xml version="1.0" encoding="utf-8"?>
-<p:presentation xmlns:a="http://schemas.openxmlformats.org/drawingml/2006/main" xmlns:r="http://schemas.openxmlformats.org/officeDocument/2006/relationships" xmlns:p="http://schemas.openxmlformats.org/presentationml/2006/main" saveSubsetFonts="1" autoCompressPictures="0">
+<p:presentation xmlns:a="http://schemas.openxmlformats.org/drawingml/2006/main" xmlns:r="http://schemas.openxmlformats.org/officeDocument/2006/relationships" xmlns:p="http://schemas.openxmlformats.org/presentationml/2006/main" autoCompressPictures="0">
   <p:sldMasterIdLst>
     <p:sldMasterId id="2147483648" r:id="rId1"/>
   </p:sldMasterIdLst>
+  <p:notesMasterIdLst>
+    <p:notesMasterId r:id="rId4"/>
+  </p:notesMasterIdLst>
   <p:sldIdLst>
-    <p:sldId id="256" r:id="rId2"/>
-    <p:sldId id="257" r:id="rId3"/>
-    <p:sldId id="258" r:id="rId4"/>
-    <p:sldId id="259" r:id="rId5"/>
-    <p:sldId id="260" r:id="rId6"/>
-    <p:sldId id="261" r:id="rId7"/>
-    <p:sldId id="262" r:id="rId8"/>
+    <p:sldId id="256" r:id="rId3"/>
+    <p:sldId id="257" r:id="rId5"/>
+    <p:sldId id="258" r:id="rId6"/>
+    <p:sldId id="259" r:id="rId7"/>
+    <p:sldId id="260" r:id="rId8"/>
+    <p:sldId id="261" r:id="rId9"/>
+    <p:sldId id="262" r:id="rId10"/>
   </p:sldIdLst>
-  <p:notesMasterIdLst>
-    <p:notesMasterId r:id="rId9"/>
-  </p:notesMasterIdLst>
   <p:sldSz cx="9144000" cy="5143500"/>
   <p:notesSz cx="5143500" cy="9144000"/>
   <p:defaultTextStyle>
@@ -195,7 +195,6 @@
           <a:p>
             <a:fld id="{5282F153-3F37-0F45-9E97-73ACFA13230C}" type="datetimeFigureOut">
               <a:rPr lang="en-US"/>
-              <a:t>7/23/19</a:t>
             </a:fld>
             <a:endParaRPr lang="en-US"/>
           </a:p>
@@ -262,6 +261,7 @@
               <a:rPr lang="en-US"/>
               <a:t>Click to edit Master text styles</a:t>
             </a:r>
+            <a:endParaRPr lang="en-US"/>
           </a:p>
           <a:p>
             <a:pPr lvl="1"/>
@@ -269,6 +269,7 @@
               <a:rPr lang="en-US"/>
               <a:t>Second level</a:t>
             </a:r>
+            <a:endParaRPr lang="en-US"/>
           </a:p>
           <a:p>
             <a:pPr lvl="2"/>
@@ -276,6 +277,7 @@
               <a:rPr lang="en-US"/>
               <a:t>Third level</a:t>
             </a:r>
+            <a:endParaRPr lang="en-US"/>
           </a:p>
           <a:p>
             <a:pPr lvl="3"/>
@@ -283,6 +285,7 @@
               <a:rPr lang="en-US"/>
               <a:t>Fourth level</a:t>
             </a:r>
+            <a:endParaRPr lang="en-US"/>
           </a:p>
           <a:p>
             <a:pPr lvl="4"/>
@@ -290,6 +293,7 @@
               <a:rPr lang="en-US"/>
               <a:t>Fifth level</a:t>
             </a:r>
+            <a:endParaRPr lang="en-US"/>
           </a:p>
         </p:txBody>
       </p:sp>
@@ -353,18 +357,12 @@
           <a:p>
             <a:fld id="{CE5E9CC1-C706-0F49-92D6-E571CC5EEA8F}" type="slidenum">
               <a:rPr lang="en-US"/>
-              <a:t>‹#›</a:t>
             </a:fld>
             <a:endParaRPr lang="en-US"/>
           </a:p>
         </p:txBody>
       </p:sp>
     </p:spTree>
-    <p:extLst>
-      <p:ext uri="{BB962C8B-B14F-4D97-AF65-F5344CB8AC3E}">
-        <p14:creationId xmlns:p14="http://schemas.microsoft.com/office/powerpoint/2010/main" val="1024086991"/>
-      </p:ext>
-    </p:extLst>
   </p:cSld>
   <p:clrMap bg1="lt1" tx1="dk1" bg2="lt2" tx2="dk2" accent1="accent1" accent2="accent2" accent3="accent3" accent4="accent4" accent5="accent5" accent6="accent6" hlink="hlink" folHlink="folHlink"/>
   <p:notesStyle>
@@ -506,10 +504,6 @@
           <a:bodyPr/>
           <a:lstStyle/>
           <a:p>
-            <a:r>
-              <a:rPr lang="en-US" dirty="0"/>
-              <a:t/>
-            </a:r>
             <a:endParaRPr lang="en-US" dirty="0"/>
           </a:p>
         </p:txBody>
@@ -531,18 +525,12 @@
           <a:p>
             <a:fld id="{F7021451-1387-4CA6-816F-3879F97B5CBC}" type="slidenum">
               <a:rPr lang="en-US"/>
-              <a:t>1</a:t>
             </a:fld>
             <a:endParaRPr lang="en-US"/>
           </a:p>
         </p:txBody>
       </p:sp>
     </p:spTree>
-    <p:extLst>
-      <p:ext uri="{BB962C8B-B14F-4D97-AF65-F5344CB8AC3E}">
-        <p14:creationId xmlns:p14="http://schemas.microsoft.com/office/powerpoint/2010/main" val="1024086991"/>
-      </p:ext>
-    </p:extLst>
   </p:cSld>
   <p:clrMapOvr>
     <a:masterClrMapping/>
@@ -594,10 +582,6 @@
           <a:bodyPr/>
           <a:lstStyle/>
           <a:p>
-            <a:r>
-              <a:rPr lang="en-US" dirty="0"/>
-              <a:t/>
-            </a:r>
             <a:endParaRPr lang="en-US" dirty="0"/>
           </a:p>
         </p:txBody>
@@ -619,18 +603,12 @@
           <a:p>
             <a:fld id="{F7021451-1387-4CA6-816F-3879F97B5CBC}" type="slidenum">
               <a:rPr lang="en-US"/>
-              <a:t>2</a:t>
             </a:fld>
             <a:endParaRPr lang="en-US"/>
           </a:p>
         </p:txBody>
       </p:sp>
     </p:spTree>
-    <p:extLst>
-      <p:ext uri="{BB962C8B-B14F-4D97-AF65-F5344CB8AC3E}">
-        <p14:creationId xmlns:p14="http://schemas.microsoft.com/office/powerpoint/2010/main" val="1024086991"/>
-      </p:ext>
-    </p:extLst>
   </p:cSld>
   <p:clrMapOvr>
     <a:masterClrMapping/>
@@ -682,10 +660,6 @@
           <a:bodyPr/>
           <a:lstStyle/>
           <a:p>
-            <a:r>
-              <a:rPr lang="en-US" dirty="0"/>
-              <a:t/>
-            </a:r>
             <a:endParaRPr lang="en-US" dirty="0"/>
           </a:p>
         </p:txBody>
@@ -707,18 +681,12 @@
           <a:p>
             <a:fld id="{F7021451-1387-4CA6-816F-3879F97B5CBC}" type="slidenum">
               <a:rPr lang="en-US"/>
-              <a:t>3</a:t>
             </a:fld>
             <a:endParaRPr lang="en-US"/>
           </a:p>
         </p:txBody>
       </p:sp>
     </p:spTree>
-    <p:extLst>
-      <p:ext uri="{BB962C8B-B14F-4D97-AF65-F5344CB8AC3E}">
-        <p14:creationId xmlns:p14="http://schemas.microsoft.com/office/powerpoint/2010/main" val="1024086991"/>
-      </p:ext>
-    </p:extLst>
   </p:cSld>
   <p:clrMapOvr>
     <a:masterClrMapping/>
@@ -770,10 +738,6 @@
           <a:bodyPr/>
           <a:lstStyle/>
           <a:p>
-            <a:r>
-              <a:rPr lang="en-US" dirty="0"/>
-              <a:t/>
-            </a:r>
             <a:endParaRPr lang="en-US" dirty="0"/>
           </a:p>
         </p:txBody>
@@ -795,18 +759,12 @@
           <a:p>
             <a:fld id="{F7021451-1387-4CA6-816F-3879F97B5CBC}" type="slidenum">
               <a:rPr lang="en-US"/>
-              <a:t>4</a:t>
             </a:fld>
             <a:endParaRPr lang="en-US"/>
           </a:p>
         </p:txBody>
       </p:sp>
     </p:spTree>
-    <p:extLst>
-      <p:ext uri="{BB962C8B-B14F-4D97-AF65-F5344CB8AC3E}">
-        <p14:creationId xmlns:p14="http://schemas.microsoft.com/office/powerpoint/2010/main" val="1024086991"/>
-      </p:ext>
-    </p:extLst>
   </p:cSld>
   <p:clrMapOvr>
     <a:masterClrMapping/>
@@ -858,10 +816,6 @@
           <a:bodyPr/>
           <a:lstStyle/>
           <a:p>
-            <a:r>
-              <a:rPr lang="en-US" dirty="0"/>
-              <a:t/>
-            </a:r>
             <a:endParaRPr lang="en-US" dirty="0"/>
           </a:p>
         </p:txBody>
@@ -883,18 +837,12 @@
           <a:p>
             <a:fld id="{F7021451-1387-4CA6-816F-3879F97B5CBC}" type="slidenum">
               <a:rPr lang="en-US"/>
-              <a:t>5</a:t>
             </a:fld>
             <a:endParaRPr lang="en-US"/>
           </a:p>
         </p:txBody>
       </p:sp>
     </p:spTree>
-    <p:extLst>
-      <p:ext uri="{BB962C8B-B14F-4D97-AF65-F5344CB8AC3E}">
-        <p14:creationId xmlns:p14="http://schemas.microsoft.com/office/powerpoint/2010/main" val="1024086991"/>
-      </p:ext>
-    </p:extLst>
   </p:cSld>
   <p:clrMapOvr>
     <a:masterClrMapping/>
@@ -946,10 +894,6 @@
           <a:bodyPr/>
           <a:lstStyle/>
           <a:p>
-            <a:r>
-              <a:rPr lang="en-US" dirty="0"/>
-              <a:t/>
-            </a:r>
             <a:endParaRPr lang="en-US" dirty="0"/>
           </a:p>
         </p:txBody>
@@ -971,18 +915,12 @@
           <a:p>
             <a:fld id="{F7021451-1387-4CA6-816F-3879F97B5CBC}" type="slidenum">
               <a:rPr lang="en-US"/>
-              <a:t>6</a:t>
             </a:fld>
             <a:endParaRPr lang="en-US"/>
           </a:p>
         </p:txBody>
       </p:sp>
     </p:spTree>
-    <p:extLst>
-      <p:ext uri="{BB962C8B-B14F-4D97-AF65-F5344CB8AC3E}">
-        <p14:creationId xmlns:p14="http://schemas.microsoft.com/office/powerpoint/2010/main" val="1024086991"/>
-      </p:ext>
-    </p:extLst>
   </p:cSld>
   <p:clrMapOvr>
     <a:masterClrMapping/>
@@ -1034,10 +972,6 @@
           <a:bodyPr/>
           <a:lstStyle/>
           <a:p>
-            <a:r>
-              <a:rPr lang="en-US" dirty="0"/>
-              <a:t/>
-            </a:r>
             <a:endParaRPr lang="en-US" dirty="0"/>
           </a:p>
         </p:txBody>
@@ -1059,18 +993,12 @@
           <a:p>
             <a:fld id="{F7021451-1387-4CA6-816F-3879F97B5CBC}" type="slidenum">
               <a:rPr lang="en-US"/>
-              <a:t>7</a:t>
             </a:fld>
             <a:endParaRPr lang="en-US"/>
           </a:p>
         </p:txBody>
       </p:sp>
     </p:spTree>
-    <p:extLst>
-      <p:ext uri="{BB962C8B-B14F-4D97-AF65-F5344CB8AC3E}">
-        <p14:creationId xmlns:p14="http://schemas.microsoft.com/office/powerpoint/2010/main" val="1024086991"/>
-      </p:ext>
-    </p:extLst>
   </p:cSld>
   <p:clrMapOvr>
     <a:masterClrMapping/>
@@ -1111,6 +1039,11 @@
 <file path=ppt/slideMasters/slideMaster1.xml><?xml version="1.0" encoding="utf-8"?>
 <p:sldMaster xmlns:a="http://schemas.openxmlformats.org/drawingml/2006/main" xmlns:r="http://schemas.openxmlformats.org/officeDocument/2006/relationships" xmlns:p="http://schemas.openxmlformats.org/presentationml/2006/main">
   <p:cSld>
+    <p:bg>
+      <p:bgRef idx="1001">
+        <a:schemeClr val="bg1"/>
+      </p:bgRef>
+    </p:bg>
     <p:spTree>
       <p:nvGrpSpPr>
         <p:cNvPr id="1" name=""/>
@@ -1154,7 +1087,7 @@
         <a:spcBef>
           <a:spcPct val="20000"/>
         </a:spcBef>
-        <a:buFont typeface="Arial" pitchFamily="34" charset="0"/>
+        <a:buFont typeface="Arial" panose="020B0604020202020204" pitchFamily="34" charset="0"/>
         <a:buChar char="•"/>
         <a:defRPr sz="3200" kern="1200">
           <a:solidFill>
@@ -1169,7 +1102,7 @@
         <a:spcBef>
           <a:spcPct val="20000"/>
         </a:spcBef>
-        <a:buFont typeface="Arial" pitchFamily="34" charset="0"/>
+        <a:buFont typeface="Arial" panose="020B0604020202020204" pitchFamily="34" charset="0"/>
         <a:buChar char="–"/>
         <a:defRPr sz="2800" kern="1200">
           <a:solidFill>
@@ -1184,7 +1117,7 @@
         <a:spcBef>
           <a:spcPct val="20000"/>
         </a:spcBef>
-        <a:buFont typeface="Arial" pitchFamily="34" charset="0"/>
+        <a:buFont typeface="Arial" panose="020B0604020202020204" pitchFamily="34" charset="0"/>
         <a:buChar char="•"/>
         <a:defRPr sz="2400" kern="1200">
           <a:solidFill>
@@ -1199,7 +1132,7 @@
         <a:spcBef>
           <a:spcPct val="20000"/>
         </a:spcBef>
-        <a:buFont typeface="Arial" pitchFamily="34" charset="0"/>
+        <a:buFont typeface="Arial" panose="020B0604020202020204" pitchFamily="34" charset="0"/>
         <a:buChar char="–"/>
         <a:defRPr sz="2000" kern="1200">
           <a:solidFill>
@@ -1214,7 +1147,7 @@
         <a:spcBef>
           <a:spcPct val="20000"/>
         </a:spcBef>
-        <a:buFont typeface="Arial" pitchFamily="34" charset="0"/>
+        <a:buFont typeface="Arial" panose="020B0604020202020204" pitchFamily="34" charset="0"/>
         <a:buChar char="»"/>
         <a:defRPr sz="2000" kern="1200">
           <a:solidFill>
@@ -1229,7 +1162,7 @@
         <a:spcBef>
           <a:spcPct val="20000"/>
         </a:spcBef>
-        <a:buFont typeface="Arial" pitchFamily="34" charset="0"/>
+        <a:buFont typeface="Arial" panose="020B0604020202020204" pitchFamily="34" charset="0"/>
         <a:buChar char="•"/>
         <a:defRPr sz="2000" kern="1200">
           <a:solidFill>
@@ -1244,7 +1177,7 @@
         <a:spcBef>
           <a:spcPct val="20000"/>
         </a:spcBef>
-        <a:buFont typeface="Arial" pitchFamily="34" charset="0"/>
+        <a:buFont typeface="Arial" panose="020B0604020202020204" pitchFamily="34" charset="0"/>
         <a:buChar char="•"/>
         <a:defRPr sz="2000" kern="1200">
           <a:solidFill>
@@ -1259,7 +1192,7 @@
         <a:spcBef>
           <a:spcPct val="20000"/>
         </a:spcBef>
-        <a:buFont typeface="Arial" pitchFamily="34" charset="0"/>
+        <a:buFont typeface="Arial" panose="020B0604020202020204" pitchFamily="34" charset="0"/>
         <a:buChar char="•"/>
         <a:defRPr sz="2000" kern="1200">
           <a:solidFill>
@@ -1274,7 +1207,7 @@
         <a:spcBef>
           <a:spcPct val="20000"/>
         </a:spcBef>
-        <a:buFont typeface="Arial" pitchFamily="34" charset="0"/>
+        <a:buFont typeface="Arial" panose="020B0604020202020204" pitchFamily="34" charset="0"/>
         <a:buChar char="•"/>
         <a:defRPr sz="2000" kern="1200">
           <a:solidFill>
@@ -1387,12 +1320,13 @@
 
 <file path=ppt/slides/slide1.xml><?xml version="1.0" encoding="utf-8"?>
 <p:sld xmlns:a="http://schemas.openxmlformats.org/drawingml/2006/main" xmlns:r="http://schemas.openxmlformats.org/officeDocument/2006/relationships" xmlns:p="http://schemas.openxmlformats.org/presentationml/2006/main">
-  <p:cSld name="Slide 1">
+  <p:cSld>
     <p:bg>
       <p:bgPr>
         <a:solidFill>
           <a:srgbClr val="0F1419"/>
         </a:solidFill>
+        <a:effectLst/>
       </p:bgPr>
     </p:bg>
     <p:spTree>
@@ -1511,13 +1445,12 @@
             <a:avLst/>
           </a:prstGeom>
           <a:noFill/>
-          <a:ln/>
         </p:spPr>
         <p:txBody>
           <a:bodyPr wrap="square" lIns="0" tIns="0" rIns="0" bIns="0" rtlCol="0" anchor="t"/>
           <a:lstStyle/>
           <a:p>
-            <a:pPr indent="0" marL="0">
+            <a:pPr marL="0" indent="0">
               <a:buNone/>
             </a:pPr>
             <a:r>
@@ -1525,9 +1458,9 @@
                 <a:solidFill>
                   <a:srgbClr val="F2F5F7"/>
                 </a:solidFill>
-                <a:latin typeface="Cambria" pitchFamily="34" charset="0"/>
-                <a:ea typeface="Cambria" pitchFamily="34" charset="-122"/>
-                <a:cs typeface="Cambria" pitchFamily="34" charset="-120"/>
+                <a:latin typeface="Cambria" panose="02040503050406030204" pitchFamily="34" charset="0"/>
+                <a:ea typeface="Cambria" panose="02040503050406030204" pitchFamily="34" charset="-122"/>
+                <a:cs typeface="Cambria" panose="02040503050406030204" pitchFamily="34" charset="-120"/>
               </a:rPr>
               <a:t>EcoSort AI</a:t>
             </a:r>
@@ -1550,13 +1483,12 @@
             <a:avLst/>
           </a:prstGeom>
           <a:noFill/>
-          <a:ln/>
         </p:spPr>
         <p:txBody>
           <a:bodyPr wrap="square" lIns="0" tIns="0" rIns="0" bIns="0" rtlCol="0" anchor="t"/>
           <a:lstStyle/>
           <a:p>
-            <a:pPr indent="0" marL="0">
+            <a:pPr marL="0" indent="0">
               <a:buNone/>
             </a:pPr>
             <a:r>
@@ -1564,9 +1496,9 @@
                 <a:solidFill>
                   <a:srgbClr val="00D9FF"/>
                 </a:solidFill>
-                <a:latin typeface="Calibri" pitchFamily="34" charset="0"/>
-                <a:ea typeface="Calibri" pitchFamily="34" charset="-122"/>
-                <a:cs typeface="Calibri" pitchFamily="34" charset="-120"/>
+                <a:latin typeface="Calibri" panose="020F0502020204030204" pitchFamily="34" charset="0"/>
+                <a:ea typeface="Calibri" panose="020F0502020204030204" pitchFamily="34" charset="-122"/>
+                <a:cs typeface="Calibri" panose="020F0502020204030204" pitchFamily="34" charset="-120"/>
               </a:rPr>
               <a:t>On-device waste segregation and impact analysis on Snapdragon PCs</a:t>
             </a:r>
@@ -1589,13 +1521,12 @@
             <a:avLst/>
           </a:prstGeom>
           <a:noFill/>
-          <a:ln/>
         </p:spPr>
         <p:txBody>
           <a:bodyPr wrap="square" lIns="0" tIns="0" rIns="0" bIns="0" rtlCol="0" anchor="t"/>
           <a:lstStyle/>
           <a:p>
-            <a:pPr indent="0" marL="0">
+            <a:pPr marL="0" indent="0">
               <a:buNone/>
             </a:pPr>
             <a:r>
@@ -1603,9 +1534,9 @@
                 <a:solidFill>
                   <a:srgbClr val="9FB0BF"/>
                 </a:solidFill>
-                <a:latin typeface="Calibri" pitchFamily="34" charset="0"/>
-                <a:ea typeface="Calibri" pitchFamily="34" charset="-122"/>
-                <a:cs typeface="Calibri" pitchFamily="34" charset="-120"/>
+                <a:latin typeface="Calibri" panose="020F0502020204030204" pitchFamily="34" charset="0"/>
+                <a:ea typeface="Calibri" panose="020F0502020204030204" pitchFamily="34" charset="-122"/>
+                <a:cs typeface="Calibri" panose="020F0502020204030204" pitchFamily="34" charset="-120"/>
               </a:rPr>
               <a:t>Sort smarter. Run local.</a:t>
             </a:r>
@@ -1628,13 +1559,12 @@
             <a:avLst/>
           </a:prstGeom>
           <a:noFill/>
-          <a:ln/>
         </p:spPr>
         <p:txBody>
           <a:bodyPr wrap="square" lIns="0" tIns="0" rIns="0" bIns="0" rtlCol="0" anchor="t"/>
           <a:lstStyle/>
           <a:p>
-            <a:pPr indent="0" marL="0">
+            <a:pPr marL="0" indent="0">
               <a:buNone/>
             </a:pPr>
             <a:r>
@@ -1642,9 +1572,9 @@
                 <a:solidFill>
                   <a:srgbClr val="9FB0BF"/>
                 </a:solidFill>
-                <a:latin typeface="Calibri" pitchFamily="34" charset="0"/>
-                <a:ea typeface="Calibri" pitchFamily="34" charset="-122"/>
-                <a:cs typeface="Calibri" pitchFamily="34" charset="-120"/>
+                <a:latin typeface="Calibri" panose="020F0502020204030204" pitchFamily="34" charset="0"/>
+                <a:ea typeface="Calibri" panose="020F0502020204030204" pitchFamily="34" charset="-122"/>
+                <a:cs typeface="Calibri" panose="020F0502020204030204" pitchFamily="34" charset="-120"/>
               </a:rPr>
               <a:t>Abdul Raheem F.  |  B.Tech AI &amp; Data Science, K. Ramakrishnan College of Technology</a:t>
             </a:r>
@@ -1667,13 +1597,12 @@
             <a:avLst/>
           </a:prstGeom>
           <a:noFill/>
-          <a:ln/>
         </p:spPr>
         <p:txBody>
           <a:bodyPr wrap="square" lIns="0" tIns="0" rIns="0" bIns="0" rtlCol="0" anchor="t"/>
           <a:lstStyle/>
           <a:p>
-            <a:pPr indent="0" marL="0">
+            <a:pPr marL="0" indent="0">
               <a:buNone/>
             </a:pPr>
             <a:r>
@@ -1681,9 +1610,9 @@
                 <a:solidFill>
                   <a:srgbClr val="9FB0BF"/>
                 </a:solidFill>
-                <a:latin typeface="Calibri" pitchFamily="34" charset="0"/>
-                <a:ea typeface="Calibri" pitchFamily="34" charset="-122"/>
-                <a:cs typeface="Calibri" pitchFamily="34" charset="-120"/>
+                <a:latin typeface="Calibri" panose="020F0502020204030204" pitchFamily="34" charset="0"/>
+                <a:ea typeface="Calibri" panose="020F0502020204030204" pitchFamily="34" charset="-122"/>
+                <a:cs typeface="Calibri" panose="020F0502020204030204" pitchFamily="34" charset="-120"/>
               </a:rPr>
               <a:t>Snapdragon AI Lab Build &amp; Present Challenge</a:t>
             </a:r>
@@ -1701,12 +1630,13 @@
 
 <file path=ppt/slides/slide2.xml><?xml version="1.0" encoding="utf-8"?>
 <p:sld xmlns:a="http://schemas.openxmlformats.org/drawingml/2006/main" xmlns:r="http://schemas.openxmlformats.org/officeDocument/2006/relationships" xmlns:p="http://schemas.openxmlformats.org/presentationml/2006/main">
-  <p:cSld name="Slide 2">
+  <p:cSld>
     <p:bg>
       <p:bgPr>
         <a:solidFill>
           <a:srgbClr val="0F1419"/>
         </a:solidFill>
+        <a:effectLst/>
       </p:bgPr>
     </p:bg>
     <p:spTree>
@@ -1738,13 +1668,12 @@
             <a:avLst/>
           </a:prstGeom>
           <a:noFill/>
-          <a:ln/>
         </p:spPr>
         <p:txBody>
           <a:bodyPr wrap="square" lIns="0" tIns="0" rIns="0" bIns="0" rtlCol="0" anchor="ctr"/>
           <a:lstStyle/>
           <a:p>
-            <a:pPr indent="0" marL="0">
+            <a:pPr marL="0" indent="0">
               <a:buNone/>
             </a:pPr>
             <a:r>
@@ -1752,9 +1681,9 @@
                 <a:solidFill>
                   <a:srgbClr val="F2F5F7"/>
                 </a:solidFill>
-                <a:latin typeface="Cambria" pitchFamily="34" charset="0"/>
-                <a:ea typeface="Cambria" pitchFamily="34" charset="-122"/>
-                <a:cs typeface="Cambria" pitchFamily="34" charset="-120"/>
+                <a:latin typeface="Cambria" panose="02040503050406030204" pitchFamily="34" charset="0"/>
+                <a:ea typeface="Cambria" panose="02040503050406030204" pitchFamily="34" charset="-122"/>
+                <a:cs typeface="Cambria" panose="02040503050406030204" pitchFamily="34" charset="-120"/>
               </a:rPr>
               <a:t>Sorting waste is harder than it looks</a:t>
             </a:r>
@@ -1829,13 +1758,12 @@
             <a:avLst/>
           </a:prstGeom>
           <a:noFill/>
-          <a:ln/>
         </p:spPr>
         <p:txBody>
           <a:bodyPr wrap="square" lIns="0" tIns="0" rIns="0" bIns="0" rtlCol="0" anchor="ctr"/>
           <a:lstStyle/>
           <a:p>
-            <a:pPr algn="ctr" indent="0" marL="0">
+            <a:pPr marL="0" indent="0" algn="ctr">
               <a:buNone/>
             </a:pPr>
             <a:r>
@@ -1843,9 +1771,9 @@
                 <a:solidFill>
                   <a:srgbClr val="0F1419"/>
                 </a:solidFill>
-                <a:latin typeface="Calibri" pitchFamily="34" charset="0"/>
-                <a:ea typeface="Calibri" pitchFamily="34" charset="-122"/>
-                <a:cs typeface="Calibri" pitchFamily="34" charset="-120"/>
+                <a:latin typeface="Calibri" panose="020F0502020204030204" pitchFamily="34" charset="0"/>
+                <a:ea typeface="Calibri" panose="020F0502020204030204" pitchFamily="34" charset="-122"/>
+                <a:cs typeface="Calibri" panose="020F0502020204030204" pitchFamily="34" charset="-120"/>
               </a:rPr>
               <a:t>1</a:t>
             </a:r>
@@ -1868,13 +1796,12 @@
             <a:avLst/>
           </a:prstGeom>
           <a:noFill/>
-          <a:ln/>
         </p:spPr>
         <p:txBody>
           <a:bodyPr wrap="square" lIns="0" tIns="0" rIns="0" bIns="0" rtlCol="0" anchor="t"/>
           <a:lstStyle/>
           <a:p>
-            <a:pPr indent="0" marL="0">
+            <a:pPr marL="0" indent="0">
               <a:buNone/>
             </a:pPr>
             <a:r>
@@ -1882,9 +1809,9 @@
                 <a:solidFill>
                   <a:srgbClr val="F2F5F7"/>
                 </a:solidFill>
-                <a:latin typeface="Calibri" pitchFamily="34" charset="0"/>
-                <a:ea typeface="Calibri" pitchFamily="34" charset="-122"/>
-                <a:cs typeface="Calibri" pitchFamily="34" charset="-120"/>
+                <a:latin typeface="Calibri" panose="020F0502020204030204" pitchFamily="34" charset="0"/>
+                <a:ea typeface="Calibri" panose="020F0502020204030204" pitchFamily="34" charset="-122"/>
+                <a:cs typeface="Calibri" panose="020F0502020204030204" pitchFamily="34" charset="-120"/>
               </a:rPr>
               <a:t>Wrong bin</a:t>
             </a:r>
@@ -1907,13 +1834,12 @@
             <a:avLst/>
           </a:prstGeom>
           <a:noFill/>
-          <a:ln/>
         </p:spPr>
         <p:txBody>
           <a:bodyPr wrap="square" lIns="0" tIns="0" rIns="0" bIns="0" rtlCol="0" anchor="t"/>
           <a:lstStyle/>
           <a:p>
-            <a:pPr indent="0" marL="0">
+            <a:pPr marL="0" indent="0">
               <a:buNone/>
             </a:pPr>
             <a:r>
@@ -1921,9 +1847,9 @@
                 <a:solidFill>
                   <a:srgbClr val="9FB0BF"/>
                 </a:solidFill>
-                <a:latin typeface="Calibri" pitchFamily="34" charset="0"/>
-                <a:ea typeface="Calibri" pitchFamily="34" charset="-122"/>
-                <a:cs typeface="Calibri" pitchFamily="34" charset="-120"/>
+                <a:latin typeface="Calibri" panose="020F0502020204030204" pitchFamily="34" charset="0"/>
+                <a:ea typeface="Calibri" panose="020F0502020204030204" pitchFamily="34" charset="-122"/>
+                <a:cs typeface="Calibri" panose="020F0502020204030204" pitchFamily="34" charset="-120"/>
               </a:rPr>
               <a:t>One misplaced item can contaminate a whole batch of recycling.</a:t>
             </a:r>
@@ -1998,13 +1924,12 @@
             <a:avLst/>
           </a:prstGeom>
           <a:noFill/>
-          <a:ln/>
         </p:spPr>
         <p:txBody>
           <a:bodyPr wrap="square" lIns="0" tIns="0" rIns="0" bIns="0" rtlCol="0" anchor="ctr"/>
           <a:lstStyle/>
           <a:p>
-            <a:pPr algn="ctr" indent="0" marL="0">
+            <a:pPr marL="0" indent="0" algn="ctr">
               <a:buNone/>
             </a:pPr>
             <a:r>
@@ -2012,9 +1937,9 @@
                 <a:solidFill>
                   <a:srgbClr val="0F1419"/>
                 </a:solidFill>
-                <a:latin typeface="Calibri" pitchFamily="34" charset="0"/>
-                <a:ea typeface="Calibri" pitchFamily="34" charset="-122"/>
-                <a:cs typeface="Calibri" pitchFamily="34" charset="-120"/>
+                <a:latin typeface="Calibri" panose="020F0502020204030204" pitchFamily="34" charset="0"/>
+                <a:ea typeface="Calibri" panose="020F0502020204030204" pitchFamily="34" charset="-122"/>
+                <a:cs typeface="Calibri" panose="020F0502020204030204" pitchFamily="34" charset="-120"/>
               </a:rPr>
               <a:t>2</a:t>
             </a:r>
@@ -2037,13 +1962,12 @@
             <a:avLst/>
           </a:prstGeom>
           <a:noFill/>
-          <a:ln/>
         </p:spPr>
         <p:txBody>
           <a:bodyPr wrap="square" lIns="0" tIns="0" rIns="0" bIns="0" rtlCol="0" anchor="t"/>
           <a:lstStyle/>
           <a:p>
-            <a:pPr indent="0" marL="0">
+            <a:pPr marL="0" indent="0">
               <a:buNone/>
             </a:pPr>
             <a:r>
@@ -2051,9 +1975,9 @@
                 <a:solidFill>
                   <a:srgbClr val="F2F5F7"/>
                 </a:solidFill>
-                <a:latin typeface="Calibri" pitchFamily="34" charset="0"/>
-                <a:ea typeface="Calibri" pitchFamily="34" charset="-122"/>
-                <a:cs typeface="Calibri" pitchFamily="34" charset="-120"/>
+                <a:latin typeface="Calibri" panose="020F0502020204030204" pitchFamily="34" charset="0"/>
+                <a:ea typeface="Calibri" panose="020F0502020204030204" pitchFamily="34" charset="-122"/>
+                <a:cs typeface="Calibri" panose="020F0502020204030204" pitchFamily="34" charset="-120"/>
               </a:rPr>
               <a:t>Cloud dependence</a:t>
             </a:r>
@@ -2076,13 +2000,12 @@
             <a:avLst/>
           </a:prstGeom>
           <a:noFill/>
-          <a:ln/>
         </p:spPr>
         <p:txBody>
           <a:bodyPr wrap="square" lIns="0" tIns="0" rIns="0" bIns="0" rtlCol="0" anchor="t"/>
           <a:lstStyle/>
           <a:p>
-            <a:pPr indent="0" marL="0">
+            <a:pPr marL="0" indent="0">
               <a:buNone/>
             </a:pPr>
             <a:r>
@@ -2090,9 +2013,9 @@
                 <a:solidFill>
                   <a:srgbClr val="9FB0BF"/>
                 </a:solidFill>
-                <a:latin typeface="Calibri" pitchFamily="34" charset="0"/>
-                <a:ea typeface="Calibri" pitchFamily="34" charset="-122"/>
-                <a:cs typeface="Calibri" pitchFamily="34" charset="-120"/>
+                <a:latin typeface="Calibri" panose="020F0502020204030204" pitchFamily="34" charset="0"/>
+                <a:ea typeface="Calibri" panose="020F0502020204030204" pitchFamily="34" charset="-122"/>
+                <a:cs typeface="Calibri" panose="020F0502020204030204" pitchFamily="34" charset="-120"/>
               </a:rPr>
               <a:t>Most sorting apps need internet and add a round trip for every photo.</a:t>
             </a:r>
@@ -2167,13 +2090,12 @@
             <a:avLst/>
           </a:prstGeom>
           <a:noFill/>
-          <a:ln/>
         </p:spPr>
         <p:txBody>
           <a:bodyPr wrap="square" lIns="0" tIns="0" rIns="0" bIns="0" rtlCol="0" anchor="ctr"/>
           <a:lstStyle/>
           <a:p>
-            <a:pPr algn="ctr" indent="0" marL="0">
+            <a:pPr marL="0" indent="0" algn="ctr">
               <a:buNone/>
             </a:pPr>
             <a:r>
@@ -2181,9 +2103,9 @@
                 <a:solidFill>
                   <a:srgbClr val="0F1419"/>
                 </a:solidFill>
-                <a:latin typeface="Calibri" pitchFamily="34" charset="0"/>
-                <a:ea typeface="Calibri" pitchFamily="34" charset="-122"/>
-                <a:cs typeface="Calibri" pitchFamily="34" charset="-120"/>
+                <a:latin typeface="Calibri" panose="020F0502020204030204" pitchFamily="34" charset="0"/>
+                <a:ea typeface="Calibri" panose="020F0502020204030204" pitchFamily="34" charset="-122"/>
+                <a:cs typeface="Calibri" panose="020F0502020204030204" pitchFamily="34" charset="-120"/>
               </a:rPr>
               <a:t>3</a:t>
             </a:r>
@@ -2206,13 +2128,12 @@
             <a:avLst/>
           </a:prstGeom>
           <a:noFill/>
-          <a:ln/>
         </p:spPr>
         <p:txBody>
           <a:bodyPr wrap="square" lIns="0" tIns="0" rIns="0" bIns="0" rtlCol="0" anchor="t"/>
           <a:lstStyle/>
           <a:p>
-            <a:pPr indent="0" marL="0">
+            <a:pPr marL="0" indent="0">
               <a:buNone/>
             </a:pPr>
             <a:r>
@@ -2220,9 +2141,9 @@
                 <a:solidFill>
                   <a:srgbClr val="F2F5F7"/>
                 </a:solidFill>
-                <a:latin typeface="Calibri" pitchFamily="34" charset="0"/>
-                <a:ea typeface="Calibri" pitchFamily="34" charset="-122"/>
-                <a:cs typeface="Calibri" pitchFamily="34" charset="-120"/>
+                <a:latin typeface="Calibri" panose="020F0502020204030204" pitchFamily="34" charset="0"/>
+                <a:ea typeface="Calibri" panose="020F0502020204030204" pitchFamily="34" charset="-122"/>
+                <a:cs typeface="Calibri" panose="020F0502020204030204" pitchFamily="34" charset="-120"/>
               </a:rPr>
               <a:t>Privacy</a:t>
             </a:r>
@@ -2245,13 +2166,12 @@
             <a:avLst/>
           </a:prstGeom>
           <a:noFill/>
-          <a:ln/>
         </p:spPr>
         <p:txBody>
           <a:bodyPr wrap="square" lIns="0" tIns="0" rIns="0" bIns="0" rtlCol="0" anchor="t"/>
           <a:lstStyle/>
           <a:p>
-            <a:pPr indent="0" marL="0">
+            <a:pPr marL="0" indent="0">
               <a:buNone/>
             </a:pPr>
             <a:r>
@@ -2259,9 +2179,9 @@
                 <a:solidFill>
                   <a:srgbClr val="9FB0BF"/>
                 </a:solidFill>
-                <a:latin typeface="Calibri" pitchFamily="34" charset="0"/>
-                <a:ea typeface="Calibri" pitchFamily="34" charset="-122"/>
-                <a:cs typeface="Calibri" pitchFamily="34" charset="-120"/>
+                <a:latin typeface="Calibri" panose="020F0502020204030204" pitchFamily="34" charset="0"/>
+                <a:ea typeface="Calibri" panose="020F0502020204030204" pitchFamily="34" charset="-122"/>
+                <a:cs typeface="Calibri" panose="020F0502020204030204" pitchFamily="34" charset="-120"/>
               </a:rPr>
               <a:t>Camera images get uploaded to servers the user never sees.</a:t>
             </a:r>
@@ -2284,13 +2204,12 @@
             <a:avLst/>
           </a:prstGeom>
           <a:noFill/>
-          <a:ln/>
         </p:spPr>
         <p:txBody>
           <a:bodyPr wrap="square" lIns="0" tIns="0" rIns="0" bIns="0" rtlCol="0" anchor="t"/>
           <a:lstStyle/>
           <a:p>
-            <a:pPr indent="0" marL="0">
+            <a:pPr marL="0" indent="0">
               <a:buNone/>
             </a:pPr>
             <a:r>
@@ -2298,9 +2217,9 @@
                 <a:solidFill>
                   <a:srgbClr val="00D9FF"/>
                 </a:solidFill>
-                <a:latin typeface="Calibri" pitchFamily="34" charset="0"/>
-                <a:ea typeface="Calibri" pitchFamily="34" charset="-122"/>
-                <a:cs typeface="Calibri" pitchFamily="34" charset="-120"/>
+                <a:latin typeface="Calibri" panose="020F0502020204030204" pitchFamily="34" charset="0"/>
+                <a:ea typeface="Calibri" panose="020F0502020204030204" pitchFamily="34" charset="-122"/>
+                <a:cs typeface="Calibri" panose="020F0502020204030204" pitchFamily="34" charset="-120"/>
               </a:rPr>
               <a:t>Sorting needs to be instant, offline, and private.</a:t>
             </a:r>
@@ -2318,12 +2237,13 @@
 
 <file path=ppt/slides/slide3.xml><?xml version="1.0" encoding="utf-8"?>
 <p:sld xmlns:a="http://schemas.openxmlformats.org/drawingml/2006/main" xmlns:r="http://schemas.openxmlformats.org/officeDocument/2006/relationships" xmlns:p="http://schemas.openxmlformats.org/presentationml/2006/main">
-  <p:cSld name="Slide 3">
+  <p:cSld>
     <p:bg>
       <p:bgPr>
         <a:solidFill>
           <a:srgbClr val="0F1419"/>
         </a:solidFill>
+        <a:effectLst/>
       </p:bgPr>
     </p:bg>
     <p:spTree>
@@ -2355,13 +2275,12 @@
             <a:avLst/>
           </a:prstGeom>
           <a:noFill/>
-          <a:ln/>
         </p:spPr>
         <p:txBody>
           <a:bodyPr wrap="square" lIns="0" tIns="0" rIns="0" bIns="0" rtlCol="0" anchor="ctr"/>
           <a:lstStyle/>
           <a:p>
-            <a:pPr indent="0" marL="0">
+            <a:pPr marL="0" indent="0">
               <a:buNone/>
             </a:pPr>
             <a:r>
@@ -2369,9 +2288,9 @@
                 <a:solidFill>
                   <a:srgbClr val="F2F5F7"/>
                 </a:solidFill>
-                <a:latin typeface="Cambria" pitchFamily="34" charset="0"/>
-                <a:ea typeface="Cambria" pitchFamily="34" charset="-122"/>
-                <a:cs typeface="Cambria" pitchFamily="34" charset="-120"/>
+                <a:latin typeface="Cambria" panose="02040503050406030204" pitchFamily="34" charset="0"/>
+                <a:ea typeface="Cambria" panose="02040503050406030204" pitchFamily="34" charset="-122"/>
+                <a:cs typeface="Cambria" panose="02040503050406030204" pitchFamily="34" charset="-120"/>
               </a:rPr>
               <a:t>Point at waste. Get the bin and the impact.</a:t>
             </a:r>
@@ -2394,7 +2313,6 @@
             <a:avLst/>
           </a:prstGeom>
           <a:noFill/>
-          <a:ln/>
         </p:spPr>
         <p:txBody>
           <a:bodyPr wrap="square" lIns="0" tIns="0" rIns="0" bIns="0" rtlCol="0" anchor="t"/>
@@ -2412,9 +2330,9 @@
                 <a:solidFill>
                   <a:srgbClr val="F2F5F7"/>
                 </a:solidFill>
-                <a:latin typeface="Calibri" pitchFamily="34" charset="0"/>
-                <a:ea typeface="Calibri" pitchFamily="34" charset="-122"/>
-                <a:cs typeface="Calibri" pitchFamily="34" charset="-120"/>
+                <a:latin typeface="Calibri" panose="020F0502020204030204" pitchFamily="34" charset="0"/>
+                <a:ea typeface="Calibri" panose="020F0502020204030204" pitchFamily="34" charset="-122"/>
+                <a:cs typeface="Calibri" panose="020F0502020204030204" pitchFamily="34" charset="-120"/>
               </a:rPr>
               <a:t>Classifies an item from a webcam frame or a photo</a:t>
             </a:r>
@@ -2433,9 +2351,9 @@
                 <a:solidFill>
                   <a:srgbClr val="F2F5F7"/>
                 </a:solidFill>
-                <a:latin typeface="Calibri" pitchFamily="34" charset="0"/>
-                <a:ea typeface="Calibri" pitchFamily="34" charset="-122"/>
-                <a:cs typeface="Calibri" pitchFamily="34" charset="-120"/>
+                <a:latin typeface="Calibri" panose="020F0502020204030204" pitchFamily="34" charset="0"/>
+                <a:ea typeface="Calibri" panose="020F0502020204030204" pitchFamily="34" charset="-122"/>
+                <a:cs typeface="Calibri" panose="020F0502020204030204" pitchFamily="34" charset="-120"/>
               </a:rPr>
               <a:t>Says which bin it goes in, with a confidence score</a:t>
             </a:r>
@@ -2454,9 +2372,9 @@
                 <a:solidFill>
                   <a:srgbClr val="F2F5F7"/>
                 </a:solidFill>
-                <a:latin typeface="Calibri" pitchFamily="34" charset="0"/>
-                <a:ea typeface="Calibri" pitchFamily="34" charset="-122"/>
-                <a:cs typeface="Calibri" pitchFamily="34" charset="-120"/>
+                <a:latin typeface="Calibri" panose="020F0502020204030204" pitchFamily="34" charset="0"/>
+                <a:ea typeface="Calibri" panose="020F0502020204030204" pitchFamily="34" charset="-122"/>
+                <a:cs typeface="Calibri" panose="020F0502020204030204" pitchFamily="34" charset="-120"/>
               </a:rPr>
               <a:t>Estimates the carbon impact of sorting it correctly</a:t>
             </a:r>
@@ -2472,9 +2390,9 @@
                 <a:solidFill>
                   <a:srgbClr val="F2F5F7"/>
                 </a:solidFill>
-                <a:latin typeface="Calibri" pitchFamily="34" charset="0"/>
-                <a:ea typeface="Calibri" pitchFamily="34" charset="-122"/>
-                <a:cs typeface="Calibri" pitchFamily="34" charset="-120"/>
+                <a:latin typeface="Calibri" panose="020F0502020204030204" pitchFamily="34" charset="0"/>
+                <a:ea typeface="Calibri" panose="020F0502020204030204" pitchFamily="34" charset="-122"/>
+                <a:cs typeface="Calibri" panose="020F0502020204030204" pitchFamily="34" charset="-120"/>
               </a:rPr>
               <a:t>Adds recycling center map, leaderboard and a chat assistant</a:t>
             </a:r>
@@ -2524,13 +2442,12 @@
             <a:avLst/>
           </a:prstGeom>
           <a:noFill/>
-          <a:ln/>
         </p:spPr>
         <p:txBody>
           <a:bodyPr wrap="square" lIns="0" tIns="0" rIns="0" bIns="0" rtlCol="0" anchor="t"/>
           <a:lstStyle/>
           <a:p>
-            <a:pPr indent="0" marL="0">
+            <a:pPr marL="0" indent="0">
               <a:buNone/>
             </a:pPr>
             <a:r>
@@ -2538,9 +2455,9 @@
                 <a:solidFill>
                   <a:srgbClr val="9FB0BF"/>
                 </a:solidFill>
-                <a:latin typeface="Calibri" pitchFamily="34" charset="0"/>
-                <a:ea typeface="Calibri" pitchFamily="34" charset="-122"/>
-                <a:cs typeface="Calibri" pitchFamily="34" charset="-120"/>
+                <a:latin typeface="Calibri" panose="020F0502020204030204" pitchFamily="34" charset="0"/>
+                <a:ea typeface="Calibri" panose="020F0502020204030204" pitchFamily="34" charset="-122"/>
+                <a:cs typeface="Calibri" panose="020F0502020204030204" pitchFamily="34" charset="-120"/>
               </a:rPr>
               <a:t>Illustrative result card</a:t>
             </a:r>
@@ -2590,13 +2507,12 @@
             <a:avLst/>
           </a:prstGeom>
           <a:noFill/>
-          <a:ln/>
         </p:spPr>
         <p:txBody>
           <a:bodyPr wrap="square" lIns="0" tIns="0" rIns="0" bIns="0" rtlCol="0" anchor="t"/>
           <a:lstStyle/>
           <a:p>
-            <a:pPr indent="0" marL="0">
+            <a:pPr marL="0" indent="0">
               <a:buNone/>
             </a:pPr>
             <a:r>
@@ -2604,9 +2520,9 @@
                 <a:solidFill>
                   <a:srgbClr val="F2F5F7"/>
                 </a:solidFill>
-                <a:latin typeface="Calibri" pitchFamily="34" charset="0"/>
-                <a:ea typeface="Calibri" pitchFamily="34" charset="-122"/>
-                <a:cs typeface="Calibri" pitchFamily="34" charset="-120"/>
+                <a:latin typeface="Calibri" panose="020F0502020204030204" pitchFamily="34" charset="0"/>
+                <a:ea typeface="Calibri" panose="020F0502020204030204" pitchFamily="34" charset="-122"/>
+                <a:cs typeface="Calibri" panose="020F0502020204030204" pitchFamily="34" charset="-120"/>
               </a:rPr>
               <a:t>Category: Plastic</a:t>
             </a:r>
@@ -2629,13 +2545,12 @@
             <a:avLst/>
           </a:prstGeom>
           <a:noFill/>
-          <a:ln/>
         </p:spPr>
         <p:txBody>
           <a:bodyPr wrap="square" lIns="0" tIns="0" rIns="0" bIns="0" rtlCol="0" anchor="t"/>
           <a:lstStyle/>
           <a:p>
-            <a:pPr indent="0" marL="0">
+            <a:pPr marL="0" indent="0">
               <a:buNone/>
             </a:pPr>
             <a:r>
@@ -2643,9 +2558,9 @@
                 <a:solidFill>
                   <a:srgbClr val="9FB0BF"/>
                 </a:solidFill>
-                <a:latin typeface="Calibri" pitchFamily="34" charset="0"/>
-                <a:ea typeface="Calibri" pitchFamily="34" charset="-122"/>
-                <a:cs typeface="Calibri" pitchFamily="34" charset="-120"/>
+                <a:latin typeface="Calibri" panose="020F0502020204030204" pitchFamily="34" charset="0"/>
+                <a:ea typeface="Calibri" panose="020F0502020204030204" pitchFamily="34" charset="-122"/>
+                <a:cs typeface="Calibri" panose="020F0502020204030204" pitchFamily="34" charset="-120"/>
               </a:rPr>
               <a:t>Confidence: shown per item</a:t>
             </a:r>
@@ -2695,13 +2610,12 @@
             <a:avLst/>
           </a:prstGeom>
           <a:noFill/>
-          <a:ln/>
         </p:spPr>
         <p:txBody>
           <a:bodyPr wrap="square" lIns="0" tIns="0" rIns="0" bIns="0" rtlCol="0" anchor="ctr"/>
           <a:lstStyle/>
           <a:p>
-            <a:pPr algn="ctr" indent="0" marL="0">
+            <a:pPr marL="0" indent="0" algn="ctr">
               <a:buNone/>
             </a:pPr>
             <a:r>
@@ -2709,9 +2623,9 @@
                 <a:solidFill>
                   <a:srgbClr val="0F1419"/>
                 </a:solidFill>
-                <a:latin typeface="Calibri" pitchFamily="34" charset="0"/>
-                <a:ea typeface="Calibri" pitchFamily="34" charset="-122"/>
-                <a:cs typeface="Calibri" pitchFamily="34" charset="-120"/>
+                <a:latin typeface="Calibri" panose="020F0502020204030204" pitchFamily="34" charset="0"/>
+                <a:ea typeface="Calibri" panose="020F0502020204030204" pitchFamily="34" charset="-122"/>
+                <a:cs typeface="Calibri" panose="020F0502020204030204" pitchFamily="34" charset="-120"/>
               </a:rPr>
               <a:t>Bin: recycling</a:t>
             </a:r>
@@ -2734,13 +2648,12 @@
             <a:avLst/>
           </a:prstGeom>
           <a:noFill/>
-          <a:ln/>
         </p:spPr>
         <p:txBody>
           <a:bodyPr wrap="square" lIns="0" tIns="0" rIns="0" bIns="0" rtlCol="0" anchor="t"/>
           <a:lstStyle/>
           <a:p>
-            <a:pPr indent="0" marL="0">
+            <a:pPr marL="0" indent="0">
               <a:buNone/>
             </a:pPr>
             <a:r>
@@ -2748,9 +2661,9 @@
                 <a:solidFill>
                   <a:srgbClr val="9FB0BF"/>
                 </a:solidFill>
-                <a:latin typeface="Calibri" pitchFamily="34" charset="0"/>
-                <a:ea typeface="Calibri" pitchFamily="34" charset="-122"/>
-                <a:cs typeface="Calibri" pitchFamily="34" charset="-120"/>
+                <a:latin typeface="Calibri" panose="020F0502020204030204" pitchFamily="34" charset="0"/>
+                <a:ea typeface="Calibri" panose="020F0502020204030204" pitchFamily="34" charset="-122"/>
+                <a:cs typeface="Calibri" panose="020F0502020204030204" pitchFamily="34" charset="-120"/>
               </a:rPr>
               <a:t>Eco impact score and EPA WARM based estimate</a:t>
             </a:r>
@@ -2768,12 +2681,13 @@
 
 <file path=ppt/slides/slide4.xml><?xml version="1.0" encoding="utf-8"?>
 <p:sld xmlns:a="http://schemas.openxmlformats.org/drawingml/2006/main" xmlns:r="http://schemas.openxmlformats.org/officeDocument/2006/relationships" xmlns:p="http://schemas.openxmlformats.org/presentationml/2006/main">
-  <p:cSld name="Slide 4">
+  <p:cSld>
     <p:bg>
       <p:bgPr>
         <a:solidFill>
           <a:srgbClr val="0F1419"/>
         </a:solidFill>
+        <a:effectLst/>
       </p:bgPr>
     </p:bg>
     <p:spTree>
@@ -2805,13 +2719,12 @@
             <a:avLst/>
           </a:prstGeom>
           <a:noFill/>
-          <a:ln/>
         </p:spPr>
         <p:txBody>
           <a:bodyPr wrap="square" lIns="0" tIns="0" rIns="0" bIns="0" rtlCol="0" anchor="ctr"/>
           <a:lstStyle/>
           <a:p>
-            <a:pPr indent="0" marL="0">
+            <a:pPr marL="0" indent="0">
               <a:buNone/>
             </a:pPr>
             <a:r>
@@ -2819,9 +2732,9 @@
                 <a:solidFill>
                   <a:srgbClr val="F2F5F7"/>
                 </a:solidFill>
-                <a:latin typeface="Cambria" pitchFamily="34" charset="0"/>
-                <a:ea typeface="Cambria" pitchFamily="34" charset="-122"/>
-                <a:cs typeface="Cambria" pitchFamily="34" charset="-120"/>
+                <a:latin typeface="Cambria" panose="02040503050406030204" pitchFamily="34" charset="0"/>
+                <a:ea typeface="Cambria" panose="02040503050406030204" pitchFamily="34" charset="-122"/>
+                <a:cs typeface="Cambria" panose="02040503050406030204" pitchFamily="34" charset="-120"/>
               </a:rPr>
               <a:t>How it works, entirely on the laptop</a:t>
             </a:r>
@@ -2896,13 +2809,12 @@
             <a:avLst/>
           </a:prstGeom>
           <a:noFill/>
-          <a:ln/>
         </p:spPr>
         <p:txBody>
           <a:bodyPr wrap="square" lIns="0" tIns="0" rIns="0" bIns="0" rtlCol="0" anchor="ctr"/>
           <a:lstStyle/>
           <a:p>
-            <a:pPr algn="ctr" indent="0" marL="0">
+            <a:pPr marL="0" indent="0" algn="ctr">
               <a:buNone/>
             </a:pPr>
             <a:r>
@@ -2910,9 +2822,9 @@
                 <a:solidFill>
                   <a:srgbClr val="0F1419"/>
                 </a:solidFill>
-                <a:latin typeface="Calibri" pitchFamily="34" charset="0"/>
-                <a:ea typeface="Calibri" pitchFamily="34" charset="-122"/>
-                <a:cs typeface="Calibri" pitchFamily="34" charset="-120"/>
+                <a:latin typeface="Calibri" panose="020F0502020204030204" pitchFamily="34" charset="0"/>
+                <a:ea typeface="Calibri" panose="020F0502020204030204" pitchFamily="34" charset="-122"/>
+                <a:cs typeface="Calibri" panose="020F0502020204030204" pitchFamily="34" charset="-120"/>
               </a:rPr>
               <a:t>1</a:t>
             </a:r>
@@ -2935,13 +2847,12 @@
             <a:avLst/>
           </a:prstGeom>
           <a:noFill/>
-          <a:ln/>
         </p:spPr>
         <p:txBody>
           <a:bodyPr wrap="square" lIns="0" tIns="0" rIns="0" bIns="0" rtlCol="0" anchor="t"/>
           <a:lstStyle/>
           <a:p>
-            <a:pPr algn="ctr" indent="0" marL="0">
+            <a:pPr marL="0" indent="0" algn="ctr">
               <a:buNone/>
             </a:pPr>
             <a:r>
@@ -2949,9 +2860,9 @@
                 <a:solidFill>
                   <a:srgbClr val="F2F5F7"/>
                 </a:solidFill>
-                <a:latin typeface="Calibri" pitchFamily="34" charset="0"/>
-                <a:ea typeface="Calibri" pitchFamily="34" charset="-122"/>
-                <a:cs typeface="Calibri" pitchFamily="34" charset="-120"/>
+                <a:latin typeface="Calibri" panose="020F0502020204030204" pitchFamily="34" charset="0"/>
+                <a:ea typeface="Calibri" panose="020F0502020204030204" pitchFamily="34" charset="-122"/>
+                <a:cs typeface="Calibri" panose="020F0502020204030204" pitchFamily="34" charset="-120"/>
               </a:rPr>
               <a:t>Camera or upload</a:t>
             </a:r>
@@ -2974,13 +2885,12 @@
             <a:avLst/>
           </a:prstGeom>
           <a:noFill/>
-          <a:ln/>
         </p:spPr>
         <p:txBody>
           <a:bodyPr wrap="square" lIns="0" tIns="0" rIns="0" bIns="0" rtlCol="0" anchor="t"/>
           <a:lstStyle/>
           <a:p>
-            <a:pPr algn="ctr" indent="0" marL="0">
+            <a:pPr marL="0" indent="0" algn="ctr">
               <a:buNone/>
             </a:pPr>
             <a:r>
@@ -2988,9 +2898,9 @@
                 <a:solidFill>
                   <a:srgbClr val="00D9FF"/>
                 </a:solidFill>
-                <a:latin typeface="Calibri" pitchFamily="34" charset="0"/>
-                <a:ea typeface="Calibri" pitchFamily="34" charset="-122"/>
-                <a:cs typeface="Calibri" pitchFamily="34" charset="-120"/>
+                <a:latin typeface="Calibri" panose="020F0502020204030204" pitchFamily="34" charset="0"/>
+                <a:ea typeface="Calibri" panose="020F0502020204030204" pitchFamily="34" charset="-122"/>
+                <a:cs typeface="Calibri" panose="020F0502020204030204" pitchFamily="34" charset="-120"/>
               </a:rPr>
               <a:t>&gt;</a:t>
             </a:r>
@@ -3065,13 +2975,12 @@
             <a:avLst/>
           </a:prstGeom>
           <a:noFill/>
-          <a:ln/>
         </p:spPr>
         <p:txBody>
           <a:bodyPr wrap="square" lIns="0" tIns="0" rIns="0" bIns="0" rtlCol="0" anchor="ctr"/>
           <a:lstStyle/>
           <a:p>
-            <a:pPr algn="ctr" indent="0" marL="0">
+            <a:pPr marL="0" indent="0" algn="ctr">
               <a:buNone/>
             </a:pPr>
             <a:r>
@@ -3079,9 +2988,9 @@
                 <a:solidFill>
                   <a:srgbClr val="0F1419"/>
                 </a:solidFill>
-                <a:latin typeface="Calibri" pitchFamily="34" charset="0"/>
-                <a:ea typeface="Calibri" pitchFamily="34" charset="-122"/>
-                <a:cs typeface="Calibri" pitchFamily="34" charset="-120"/>
+                <a:latin typeface="Calibri" panose="020F0502020204030204" pitchFamily="34" charset="0"/>
+                <a:ea typeface="Calibri" panose="020F0502020204030204" pitchFamily="34" charset="-122"/>
+                <a:cs typeface="Calibri" panose="020F0502020204030204" pitchFamily="34" charset="-120"/>
               </a:rPr>
               <a:t>2</a:t>
             </a:r>
@@ -3104,13 +3013,12 @@
             <a:avLst/>
           </a:prstGeom>
           <a:noFill/>
-          <a:ln/>
         </p:spPr>
         <p:txBody>
           <a:bodyPr wrap="square" lIns="0" tIns="0" rIns="0" bIns="0" rtlCol="0" anchor="t"/>
           <a:lstStyle/>
           <a:p>
-            <a:pPr algn="ctr" indent="0" marL="0">
+            <a:pPr marL="0" indent="0" algn="ctr">
               <a:buNone/>
             </a:pPr>
             <a:r>
@@ -3118,9 +3026,9 @@
                 <a:solidFill>
                   <a:srgbClr val="F2F5F7"/>
                 </a:solidFill>
-                <a:latin typeface="Calibri" pitchFamily="34" charset="0"/>
-                <a:ea typeface="Calibri" pitchFamily="34" charset="-122"/>
-                <a:cs typeface="Calibri" pitchFamily="34" charset="-120"/>
+                <a:latin typeface="Calibri" panose="020F0502020204030204" pitchFamily="34" charset="0"/>
+                <a:ea typeface="Calibri" panose="020F0502020204030204" pitchFamily="34" charset="-122"/>
+                <a:cs typeface="Calibri" panose="020F0502020204030204" pitchFamily="34" charset="-120"/>
               </a:rPr>
               <a:t>Resize and normalize</a:t>
             </a:r>
@@ -3143,13 +3051,12 @@
             <a:avLst/>
           </a:prstGeom>
           <a:noFill/>
-          <a:ln/>
         </p:spPr>
         <p:txBody>
           <a:bodyPr wrap="square" lIns="0" tIns="0" rIns="0" bIns="0" rtlCol="0" anchor="t"/>
           <a:lstStyle/>
           <a:p>
-            <a:pPr algn="ctr" indent="0" marL="0">
+            <a:pPr marL="0" indent="0" algn="ctr">
               <a:buNone/>
             </a:pPr>
             <a:r>
@@ -3157,9 +3064,9 @@
                 <a:solidFill>
                   <a:srgbClr val="00D9FF"/>
                 </a:solidFill>
-                <a:latin typeface="Calibri" pitchFamily="34" charset="0"/>
-                <a:ea typeface="Calibri" pitchFamily="34" charset="-122"/>
-                <a:cs typeface="Calibri" pitchFamily="34" charset="-120"/>
+                <a:latin typeface="Calibri" panose="020F0502020204030204" pitchFamily="34" charset="0"/>
+                <a:ea typeface="Calibri" panose="020F0502020204030204" pitchFamily="34" charset="-122"/>
+                <a:cs typeface="Calibri" panose="020F0502020204030204" pitchFamily="34" charset="-120"/>
               </a:rPr>
               <a:t>&gt;</a:t>
             </a:r>
@@ -3234,13 +3141,12 @@
             <a:avLst/>
           </a:prstGeom>
           <a:noFill/>
-          <a:ln/>
         </p:spPr>
         <p:txBody>
           <a:bodyPr wrap="square" lIns="0" tIns="0" rIns="0" bIns="0" rtlCol="0" anchor="ctr"/>
           <a:lstStyle/>
           <a:p>
-            <a:pPr algn="ctr" indent="0" marL="0">
+            <a:pPr marL="0" indent="0" algn="ctr">
               <a:buNone/>
             </a:pPr>
             <a:r>
@@ -3248,9 +3154,9 @@
                 <a:solidFill>
                   <a:srgbClr val="0F1419"/>
                 </a:solidFill>
-                <a:latin typeface="Calibri" pitchFamily="34" charset="0"/>
-                <a:ea typeface="Calibri" pitchFamily="34" charset="-122"/>
-                <a:cs typeface="Calibri" pitchFamily="34" charset="-120"/>
+                <a:latin typeface="Calibri" panose="020F0502020204030204" pitchFamily="34" charset="0"/>
+                <a:ea typeface="Calibri" panose="020F0502020204030204" pitchFamily="34" charset="-122"/>
+                <a:cs typeface="Calibri" panose="020F0502020204030204" pitchFamily="34" charset="-120"/>
               </a:rPr>
               <a:t>3</a:t>
             </a:r>
@@ -3273,13 +3179,12 @@
             <a:avLst/>
           </a:prstGeom>
           <a:noFill/>
-          <a:ln/>
         </p:spPr>
         <p:txBody>
           <a:bodyPr wrap="square" lIns="0" tIns="0" rIns="0" bIns="0" rtlCol="0" anchor="t"/>
           <a:lstStyle/>
           <a:p>
-            <a:pPr algn="ctr" indent="0" marL="0">
+            <a:pPr marL="0" indent="0" algn="ctr">
               <a:buNone/>
             </a:pPr>
             <a:r>
@@ -3287,9 +3192,9 @@
                 <a:solidFill>
                   <a:srgbClr val="00D9FF"/>
                 </a:solidFill>
-                <a:latin typeface="Calibri" pitchFamily="34" charset="0"/>
-                <a:ea typeface="Calibri" pitchFamily="34" charset="-122"/>
-                <a:cs typeface="Calibri" pitchFamily="34" charset="-120"/>
+                <a:latin typeface="Calibri" panose="020F0502020204030204" pitchFamily="34" charset="0"/>
+                <a:ea typeface="Calibri" panose="020F0502020204030204" pitchFamily="34" charset="-122"/>
+                <a:cs typeface="Calibri" panose="020F0502020204030204" pitchFamily="34" charset="-120"/>
               </a:rPr>
               <a:t>NPU classifier</a:t>
             </a:r>
@@ -3312,13 +3217,12 @@
             <a:avLst/>
           </a:prstGeom>
           <a:noFill/>
-          <a:ln/>
         </p:spPr>
         <p:txBody>
           <a:bodyPr wrap="square" lIns="0" tIns="0" rIns="0" bIns="0" rtlCol="0" anchor="t"/>
           <a:lstStyle/>
           <a:p>
-            <a:pPr algn="ctr" indent="0" marL="0">
+            <a:pPr marL="0" indent="0" algn="ctr">
               <a:buNone/>
             </a:pPr>
             <a:r>
@@ -3326,9 +3230,9 @@
                 <a:solidFill>
                   <a:srgbClr val="00D9FF"/>
                 </a:solidFill>
-                <a:latin typeface="Calibri" pitchFamily="34" charset="0"/>
-                <a:ea typeface="Calibri" pitchFamily="34" charset="-122"/>
-                <a:cs typeface="Calibri" pitchFamily="34" charset="-120"/>
+                <a:latin typeface="Calibri" panose="020F0502020204030204" pitchFamily="34" charset="0"/>
+                <a:ea typeface="Calibri" panose="020F0502020204030204" pitchFamily="34" charset="-122"/>
+                <a:cs typeface="Calibri" panose="020F0502020204030204" pitchFamily="34" charset="-120"/>
               </a:rPr>
               <a:t>&gt;</a:t>
             </a:r>
@@ -3403,13 +3307,12 @@
             <a:avLst/>
           </a:prstGeom>
           <a:noFill/>
-          <a:ln/>
         </p:spPr>
         <p:txBody>
           <a:bodyPr wrap="square" lIns="0" tIns="0" rIns="0" bIns="0" rtlCol="0" anchor="ctr"/>
           <a:lstStyle/>
           <a:p>
-            <a:pPr algn="ctr" indent="0" marL="0">
+            <a:pPr marL="0" indent="0" algn="ctr">
               <a:buNone/>
             </a:pPr>
             <a:r>
@@ -3417,9 +3320,9 @@
                 <a:solidFill>
                   <a:srgbClr val="0F1419"/>
                 </a:solidFill>
-                <a:latin typeface="Calibri" pitchFamily="34" charset="0"/>
-                <a:ea typeface="Calibri" pitchFamily="34" charset="-122"/>
-                <a:cs typeface="Calibri" pitchFamily="34" charset="-120"/>
+                <a:latin typeface="Calibri" panose="020F0502020204030204" pitchFamily="34" charset="0"/>
+                <a:ea typeface="Calibri" panose="020F0502020204030204" pitchFamily="34" charset="-122"/>
+                <a:cs typeface="Calibri" panose="020F0502020204030204" pitchFamily="34" charset="-120"/>
               </a:rPr>
               <a:t>4</a:t>
             </a:r>
@@ -3442,13 +3345,12 @@
             <a:avLst/>
           </a:prstGeom>
           <a:noFill/>
-          <a:ln/>
         </p:spPr>
         <p:txBody>
           <a:bodyPr wrap="square" lIns="0" tIns="0" rIns="0" bIns="0" rtlCol="0" anchor="t"/>
           <a:lstStyle/>
           <a:p>
-            <a:pPr algn="ctr" indent="0" marL="0">
+            <a:pPr marL="0" indent="0" algn="ctr">
               <a:buNone/>
             </a:pPr>
             <a:r>
@@ -3456,9 +3358,9 @@
                 <a:solidFill>
                   <a:srgbClr val="F2F5F7"/>
                 </a:solidFill>
-                <a:latin typeface="Calibri" pitchFamily="34" charset="0"/>
-                <a:ea typeface="Calibri" pitchFamily="34" charset="-122"/>
-                <a:cs typeface="Calibri" pitchFamily="34" charset="-120"/>
+                <a:latin typeface="Calibri" panose="020F0502020204030204" pitchFamily="34" charset="0"/>
+                <a:ea typeface="Calibri" panose="020F0502020204030204" pitchFamily="34" charset="-122"/>
+                <a:cs typeface="Calibri" panose="020F0502020204030204" pitchFamily="34" charset="-120"/>
               </a:rPr>
               <a:t>Impact lookup</a:t>
             </a:r>
@@ -3481,13 +3383,12 @@
             <a:avLst/>
           </a:prstGeom>
           <a:noFill/>
-          <a:ln/>
         </p:spPr>
         <p:txBody>
           <a:bodyPr wrap="square" lIns="0" tIns="0" rIns="0" bIns="0" rtlCol="0" anchor="t"/>
           <a:lstStyle/>
           <a:p>
-            <a:pPr algn="ctr" indent="0" marL="0">
+            <a:pPr marL="0" indent="0" algn="ctr">
               <a:buNone/>
             </a:pPr>
             <a:r>
@@ -3495,9 +3396,9 @@
                 <a:solidFill>
                   <a:srgbClr val="00D9FF"/>
                 </a:solidFill>
-                <a:latin typeface="Calibri" pitchFamily="34" charset="0"/>
-                <a:ea typeface="Calibri" pitchFamily="34" charset="-122"/>
-                <a:cs typeface="Calibri" pitchFamily="34" charset="-120"/>
+                <a:latin typeface="Calibri" panose="020F0502020204030204" pitchFamily="34" charset="0"/>
+                <a:ea typeface="Calibri" panose="020F0502020204030204" pitchFamily="34" charset="-122"/>
+                <a:cs typeface="Calibri" panose="020F0502020204030204" pitchFamily="34" charset="-120"/>
               </a:rPr>
               <a:t>&gt;</a:t>
             </a:r>
@@ -3572,13 +3473,12 @@
             <a:avLst/>
           </a:prstGeom>
           <a:noFill/>
-          <a:ln/>
         </p:spPr>
         <p:txBody>
           <a:bodyPr wrap="square" lIns="0" tIns="0" rIns="0" bIns="0" rtlCol="0" anchor="ctr"/>
           <a:lstStyle/>
           <a:p>
-            <a:pPr algn="ctr" indent="0" marL="0">
+            <a:pPr marL="0" indent="0" algn="ctr">
               <a:buNone/>
             </a:pPr>
             <a:r>
@@ -3586,9 +3486,9 @@
                 <a:solidFill>
                   <a:srgbClr val="0F1419"/>
                 </a:solidFill>
-                <a:latin typeface="Calibri" pitchFamily="34" charset="0"/>
-                <a:ea typeface="Calibri" pitchFamily="34" charset="-122"/>
-                <a:cs typeface="Calibri" pitchFamily="34" charset="-120"/>
+                <a:latin typeface="Calibri" panose="020F0502020204030204" pitchFamily="34" charset="0"/>
+                <a:ea typeface="Calibri" panose="020F0502020204030204" pitchFamily="34" charset="-122"/>
+                <a:cs typeface="Calibri" panose="020F0502020204030204" pitchFamily="34" charset="-120"/>
               </a:rPr>
               <a:t>5</a:t>
             </a:r>
@@ -3611,13 +3511,12 @@
             <a:avLst/>
           </a:prstGeom>
           <a:noFill/>
-          <a:ln/>
         </p:spPr>
         <p:txBody>
           <a:bodyPr wrap="square" lIns="0" tIns="0" rIns="0" bIns="0" rtlCol="0" anchor="t"/>
           <a:lstStyle/>
           <a:p>
-            <a:pPr algn="ctr" indent="0" marL="0">
+            <a:pPr marL="0" indent="0" algn="ctr">
               <a:buNone/>
             </a:pPr>
             <a:r>
@@ -3625,9 +3524,9 @@
                 <a:solidFill>
                   <a:srgbClr val="F2F5F7"/>
                 </a:solidFill>
-                <a:latin typeface="Calibri" pitchFamily="34" charset="0"/>
-                <a:ea typeface="Calibri" pitchFamily="34" charset="-122"/>
-                <a:cs typeface="Calibri" pitchFamily="34" charset="-120"/>
+                <a:latin typeface="Calibri" panose="020F0502020204030204" pitchFamily="34" charset="0"/>
+                <a:ea typeface="Calibri" panose="020F0502020204030204" pitchFamily="34" charset="-122"/>
+                <a:cs typeface="Calibri" panose="020F0502020204030204" pitchFamily="34" charset="-120"/>
               </a:rPr>
               <a:t>Dashboard</a:t>
             </a:r>
@@ -3650,13 +3549,12 @@
             <a:avLst/>
           </a:prstGeom>
           <a:noFill/>
-          <a:ln/>
         </p:spPr>
         <p:txBody>
           <a:bodyPr wrap="square" lIns="0" tIns="0" rIns="0" bIns="0" rtlCol="0" anchor="t"/>
           <a:lstStyle/>
           <a:p>
-            <a:pPr indent="0" marL="0">
+            <a:pPr marL="0" indent="0">
               <a:buNone/>
             </a:pPr>
             <a:r>
@@ -3664,9 +3562,9 @@
                 <a:solidFill>
                   <a:srgbClr val="9FB0BF"/>
                 </a:solidFill>
-                <a:latin typeface="Calibri" pitchFamily="34" charset="0"/>
-                <a:ea typeface="Calibri" pitchFamily="34" charset="-122"/>
-                <a:cs typeface="Calibri" pitchFamily="34" charset="-120"/>
+                <a:latin typeface="Calibri" panose="020F0502020204030204" pitchFamily="34" charset="0"/>
+                <a:ea typeface="Calibri" panose="020F0502020204030204" pitchFamily="34" charset="-122"/>
+                <a:cs typeface="Calibri" panose="020F0502020204030204" pitchFamily="34" charset="-120"/>
               </a:rPr>
               <a:t>Local Flask API  |  React UI  |  SQLite  |  EPA WARM emission lookup</a:t>
             </a:r>
@@ -3689,13 +3587,12 @@
             <a:avLst/>
           </a:prstGeom>
           <a:noFill/>
-          <a:ln/>
         </p:spPr>
         <p:txBody>
           <a:bodyPr wrap="square" lIns="0" tIns="0" rIns="0" bIns="0" rtlCol="0" anchor="t"/>
           <a:lstStyle/>
           <a:p>
-            <a:pPr indent="0" marL="0">
+            <a:pPr marL="0" indent="0">
               <a:buNone/>
             </a:pPr>
             <a:r>
@@ -3703,9 +3600,9 @@
                 <a:solidFill>
                   <a:srgbClr val="00D9FF"/>
                 </a:solidFill>
-                <a:latin typeface="Calibri" pitchFamily="34" charset="0"/>
-                <a:ea typeface="Calibri" pitchFamily="34" charset="-122"/>
-                <a:cs typeface="Calibri" pitchFamily="34" charset="-120"/>
+                <a:latin typeface="Calibri" panose="020F0502020204030204" pitchFamily="34" charset="0"/>
+                <a:ea typeface="Calibri" panose="020F0502020204030204" pitchFamily="34" charset="-122"/>
+                <a:cs typeface="Calibri" panose="020F0502020204030204" pitchFamily="34" charset="-120"/>
               </a:rPr>
               <a:t>No cloud calls. No image leaves the device.</a:t>
             </a:r>
@@ -3723,12 +3620,13 @@
 
 <file path=ppt/slides/slide5.xml><?xml version="1.0" encoding="utf-8"?>
 <p:sld xmlns:a="http://schemas.openxmlformats.org/drawingml/2006/main" xmlns:r="http://schemas.openxmlformats.org/officeDocument/2006/relationships" xmlns:p="http://schemas.openxmlformats.org/presentationml/2006/main">
-  <p:cSld name="Slide 5">
+  <p:cSld>
     <p:bg>
       <p:bgPr>
         <a:solidFill>
           <a:srgbClr val="0F1419"/>
         </a:solidFill>
+        <a:effectLst/>
       </p:bgPr>
     </p:bg>
     <p:spTree>
@@ -3760,13 +3658,12 @@
             <a:avLst/>
           </a:prstGeom>
           <a:noFill/>
-          <a:ln/>
         </p:spPr>
         <p:txBody>
           <a:bodyPr wrap="square" lIns="0" tIns="0" rIns="0" bIns="0" rtlCol="0" anchor="ctr"/>
           <a:lstStyle/>
           <a:p>
-            <a:pPr indent="0" marL="0">
+            <a:pPr marL="0" indent="0">
               <a:buNone/>
             </a:pPr>
             <a:r>
@@ -3774,9 +3671,9 @@
                 <a:solidFill>
                   <a:srgbClr val="F2F5F7"/>
                 </a:solidFill>
-                <a:latin typeface="Cambria" pitchFamily="34" charset="0"/>
-                <a:ea typeface="Cambria" pitchFamily="34" charset="-122"/>
-                <a:cs typeface="Cambria" pitchFamily="34" charset="-120"/>
+                <a:latin typeface="Cambria" panose="02040503050406030204" pitchFamily="34" charset="0"/>
+                <a:ea typeface="Cambria" panose="02040503050406030204" pitchFamily="34" charset="-122"/>
+                <a:cs typeface="Cambria" panose="02040503050406030204" pitchFamily="34" charset="-120"/>
               </a:rPr>
               <a:t>Built for Snapdragon with AI Hub</a:t>
             </a:r>
@@ -3826,13 +3723,12 @@
             <a:avLst/>
           </a:prstGeom>
           <a:noFill/>
-          <a:ln/>
         </p:spPr>
         <p:txBody>
           <a:bodyPr wrap="square" lIns="0" tIns="0" rIns="0" bIns="0" rtlCol="0" anchor="t"/>
           <a:lstStyle/>
           <a:p>
-            <a:pPr indent="0" marL="0">
+            <a:pPr marL="0" indent="0">
               <a:buNone/>
             </a:pPr>
             <a:r>
@@ -3840,9 +3736,9 @@
                 <a:solidFill>
                   <a:srgbClr val="F2F5F7"/>
                 </a:solidFill>
-                <a:latin typeface="Calibri" pitchFamily="34" charset="0"/>
-                <a:ea typeface="Calibri" pitchFamily="34" charset="-122"/>
-                <a:cs typeface="Calibri" pitchFamily="34" charset="-120"/>
+                <a:latin typeface="Calibri" panose="020F0502020204030204" pitchFamily="34" charset="0"/>
+                <a:ea typeface="Calibri" panose="020F0502020204030204" pitchFamily="34" charset="-122"/>
+                <a:cs typeface="Calibri" panose="020F0502020204030204" pitchFamily="34" charset="-120"/>
               </a:rPr>
               <a:t>Compile</a:t>
             </a:r>
@@ -3865,13 +3761,12 @@
             <a:avLst/>
           </a:prstGeom>
           <a:noFill/>
-          <a:ln/>
         </p:spPr>
         <p:txBody>
           <a:bodyPr wrap="square" lIns="0" tIns="0" rIns="0" bIns="0" rtlCol="0" anchor="t"/>
           <a:lstStyle/>
           <a:p>
-            <a:pPr indent="0" marL="0">
+            <a:pPr marL="0" indent="0">
               <a:buNone/>
             </a:pPr>
             <a:r>
@@ -3879,9 +3774,9 @@
                 <a:solidFill>
                   <a:srgbClr val="9FB0BF"/>
                 </a:solidFill>
-                <a:latin typeface="Calibri" pitchFamily="34" charset="0"/>
-                <a:ea typeface="Calibri" pitchFamily="34" charset="-122"/>
-                <a:cs typeface="Calibri" pitchFamily="34" charset="-120"/>
+                <a:latin typeface="Calibri" panose="020F0502020204030204" pitchFamily="34" charset="0"/>
+                <a:ea typeface="Calibri" panose="020F0502020204030204" pitchFamily="34" charset="-122"/>
+                <a:cs typeface="Calibri" panose="020F0502020204030204" pitchFamily="34" charset="-120"/>
               </a:rPr>
               <a:t>MobileNetV3-Large exported to ONNX and compiled for Snapdragon X on AI Hub.</a:t>
             </a:r>
@@ -3931,13 +3826,12 @@
             <a:avLst/>
           </a:prstGeom>
           <a:noFill/>
-          <a:ln/>
         </p:spPr>
         <p:txBody>
           <a:bodyPr wrap="square" lIns="0" tIns="0" rIns="0" bIns="0" rtlCol="0" anchor="t"/>
           <a:lstStyle/>
           <a:p>
-            <a:pPr indent="0" marL="0">
+            <a:pPr marL="0" indent="0">
               <a:buNone/>
             </a:pPr>
             <a:r>
@@ -3945,9 +3839,9 @@
                 <a:solidFill>
                   <a:srgbClr val="F2F5F7"/>
                 </a:solidFill>
-                <a:latin typeface="Calibri" pitchFamily="34" charset="0"/>
-                <a:ea typeface="Calibri" pitchFamily="34" charset="-122"/>
-                <a:cs typeface="Calibri" pitchFamily="34" charset="-120"/>
+                <a:latin typeface="Calibri" panose="020F0502020204030204" pitchFamily="34" charset="0"/>
+                <a:ea typeface="Calibri" panose="020F0502020204030204" pitchFamily="34" charset="-122"/>
+                <a:cs typeface="Calibri" panose="020F0502020204030204" pitchFamily="34" charset="-120"/>
               </a:rPr>
               <a:t>Profile</a:t>
             </a:r>
@@ -3970,13 +3864,12 @@
             <a:avLst/>
           </a:prstGeom>
           <a:noFill/>
-          <a:ln/>
         </p:spPr>
         <p:txBody>
           <a:bodyPr wrap="square" lIns="0" tIns="0" rIns="0" bIns="0" rtlCol="0" anchor="t"/>
           <a:lstStyle/>
           <a:p>
-            <a:pPr indent="0" marL="0">
+            <a:pPr marL="0" indent="0">
               <a:buNone/>
             </a:pPr>
             <a:r>
@@ -3984,9 +3877,9 @@
                 <a:solidFill>
                   <a:srgbClr val="9FB0BF"/>
                 </a:solidFill>
-                <a:latin typeface="Calibri" pitchFamily="34" charset="0"/>
-                <a:ea typeface="Calibri" pitchFamily="34" charset="-122"/>
-                <a:cs typeface="Calibri" pitchFamily="34" charset="-120"/>
+                <a:latin typeface="Calibri" panose="020F0502020204030204" pitchFamily="34" charset="0"/>
+                <a:ea typeface="Calibri" panose="020F0502020204030204" pitchFamily="34" charset="-122"/>
+                <a:cs typeface="Calibri" panose="020F0502020204030204" pitchFamily="34" charset="-120"/>
               </a:rPr>
               <a:t>AI Hub profile job checks per-layer runtime before the model touches my laptop.</a:t>
             </a:r>
@@ -4036,13 +3929,12 @@
             <a:avLst/>
           </a:prstGeom>
           <a:noFill/>
-          <a:ln/>
         </p:spPr>
         <p:txBody>
           <a:bodyPr wrap="square" lIns="0" tIns="0" rIns="0" bIns="0" rtlCol="0" anchor="t"/>
           <a:lstStyle/>
           <a:p>
-            <a:pPr indent="0" marL="0">
+            <a:pPr marL="0" indent="0">
               <a:buNone/>
             </a:pPr>
             <a:r>
@@ -4050,9 +3942,9 @@
                 <a:solidFill>
                   <a:srgbClr val="F2F5F7"/>
                 </a:solidFill>
-                <a:latin typeface="Calibri" pitchFamily="34" charset="0"/>
-                <a:ea typeface="Calibri" pitchFamily="34" charset="-122"/>
-                <a:cs typeface="Calibri" pitchFamily="34" charset="-120"/>
+                <a:latin typeface="Calibri" panose="020F0502020204030204" pitchFamily="34" charset="0"/>
+                <a:ea typeface="Calibri" panose="020F0502020204030204" pitchFamily="34" charset="-122"/>
+                <a:cs typeface="Calibri" panose="020F0502020204030204" pitchFamily="34" charset="-120"/>
               </a:rPr>
               <a:t>Run</a:t>
             </a:r>
@@ -4075,13 +3967,12 @@
             <a:avLst/>
           </a:prstGeom>
           <a:noFill/>
-          <a:ln/>
         </p:spPr>
         <p:txBody>
           <a:bodyPr wrap="square" lIns="0" tIns="0" rIns="0" bIns="0" rtlCol="0" anchor="t"/>
           <a:lstStyle/>
           <a:p>
-            <a:pPr indent="0" marL="0">
+            <a:pPr marL="0" indent="0">
               <a:buNone/>
             </a:pPr>
             <a:r>
@@ -4089,9 +3980,9 @@
                 <a:solidFill>
                   <a:srgbClr val="9FB0BF"/>
                 </a:solidFill>
-                <a:latin typeface="Calibri" pitchFamily="34" charset="0"/>
-                <a:ea typeface="Calibri" pitchFamily="34" charset="-122"/>
-                <a:cs typeface="Calibri" pitchFamily="34" charset="-120"/>
+                <a:latin typeface="Calibri" panose="020F0502020204030204" pitchFamily="34" charset="0"/>
+                <a:ea typeface="Calibri" panose="020F0502020204030204" pitchFamily="34" charset="-122"/>
+                <a:cs typeface="Calibri" panose="020F0502020204030204" pitchFamily="34" charset="-120"/>
               </a:rPr>
               <a:t>ONNX Runtime with the QNN execution provider on the NPU, CPU as fallback.</a:t>
             </a:r>
@@ -4114,13 +4005,12 @@
             <a:avLst/>
           </a:prstGeom>
           <a:noFill/>
-          <a:ln/>
         </p:spPr>
         <p:txBody>
           <a:bodyPr wrap="square" lIns="0" tIns="0" rIns="0" bIns="0" rtlCol="0" anchor="t"/>
           <a:lstStyle/>
           <a:p>
-            <a:pPr indent="0" marL="0">
+            <a:pPr marL="0" indent="0">
               <a:buNone/>
             </a:pPr>
             <a:r>
@@ -4128,11 +4018,11 @@
                 <a:solidFill>
                   <a:srgbClr val="00D9FF"/>
                 </a:solidFill>
-                <a:latin typeface="Cambria" pitchFamily="34" charset="0"/>
-                <a:ea typeface="Cambria" pitchFamily="34" charset="-122"/>
-                <a:cs typeface="Cambria" pitchFamily="34" charset="-120"/>
-              </a:rPr>
-              <a:t>[FILL] ms</a:t>
+                <a:latin typeface="Cambria" panose="02040503050406030204" pitchFamily="34" charset="0"/>
+                <a:ea typeface="Cambria" panose="02040503050406030204" pitchFamily="34" charset="-122"/>
+                <a:cs typeface="Cambria" panose="02040503050406030204" pitchFamily="34" charset="-120"/>
+              </a:rPr>
+              <a:t>3.4ms</a:t>
             </a:r>
             <a:endParaRPr lang="en-US" sz="3600" dirty="0"/>
           </a:p>
@@ -4153,13 +4043,12 @@
             <a:avLst/>
           </a:prstGeom>
           <a:noFill/>
-          <a:ln/>
         </p:spPr>
         <p:txBody>
           <a:bodyPr wrap="square" lIns="0" tIns="0" rIns="0" bIns="0" rtlCol="0" anchor="t"/>
           <a:lstStyle/>
           <a:p>
-            <a:pPr indent="0" marL="0">
+            <a:pPr marL="0" indent="0">
               <a:buNone/>
             </a:pPr>
             <a:r>
@@ -4167,9 +4056,9 @@
                 <a:solidFill>
                   <a:srgbClr val="9FB0BF"/>
                 </a:solidFill>
-                <a:latin typeface="Calibri" pitchFamily="34" charset="0"/>
-                <a:ea typeface="Calibri" pitchFamily="34" charset="-122"/>
-                <a:cs typeface="Calibri" pitchFamily="34" charset="-120"/>
+                <a:latin typeface="Calibri" panose="020F0502020204030204" pitchFamily="34" charset="0"/>
+                <a:ea typeface="Calibri" panose="020F0502020204030204" pitchFamily="34" charset="-122"/>
+                <a:cs typeface="Calibri" panose="020F0502020204030204" pitchFamily="34" charset="-120"/>
               </a:rPr>
               <a:t>NPU latency per image</a:t>
             </a:r>
@@ -4192,13 +4081,12 @@
             <a:avLst/>
           </a:prstGeom>
           <a:noFill/>
-          <a:ln/>
         </p:spPr>
         <p:txBody>
           <a:bodyPr wrap="square" lIns="0" tIns="0" rIns="0" bIns="0" rtlCol="0" anchor="t"/>
           <a:lstStyle/>
           <a:p>
-            <a:pPr indent="0" marL="0">
+            <a:pPr marL="0" indent="0">
               <a:buNone/>
             </a:pPr>
             <a:r>
@@ -4206,11 +4094,11 @@
                 <a:solidFill>
                   <a:srgbClr val="00D9FF"/>
                 </a:solidFill>
-                <a:latin typeface="Cambria" pitchFamily="34" charset="0"/>
-                <a:ea typeface="Cambria" pitchFamily="34" charset="-122"/>
-                <a:cs typeface="Cambria" pitchFamily="34" charset="-120"/>
-              </a:rPr>
-              <a:t>[FILL] ms</a:t>
+                <a:latin typeface="Cambria" panose="02040503050406030204" pitchFamily="34" charset="0"/>
+                <a:ea typeface="Cambria" panose="02040503050406030204" pitchFamily="34" charset="-122"/>
+                <a:cs typeface="Cambria" panose="02040503050406030204" pitchFamily="34" charset="-120"/>
+              </a:rPr>
+              <a:t>12.3ms</a:t>
             </a:r>
             <a:endParaRPr lang="en-US" sz="3600" dirty="0"/>
           </a:p>
@@ -4231,13 +4119,12 @@
             <a:avLst/>
           </a:prstGeom>
           <a:noFill/>
-          <a:ln/>
         </p:spPr>
         <p:txBody>
           <a:bodyPr wrap="square" lIns="0" tIns="0" rIns="0" bIns="0" rtlCol="0" anchor="t"/>
           <a:lstStyle/>
           <a:p>
-            <a:pPr indent="0" marL="0">
+            <a:pPr marL="0" indent="0">
               <a:buNone/>
             </a:pPr>
             <a:r>
@@ -4245,9 +4132,9 @@
                 <a:solidFill>
                   <a:srgbClr val="9FB0BF"/>
                 </a:solidFill>
-                <a:latin typeface="Calibri" pitchFamily="34" charset="0"/>
-                <a:ea typeface="Calibri" pitchFamily="34" charset="-122"/>
-                <a:cs typeface="Calibri" pitchFamily="34" charset="-120"/>
+                <a:latin typeface="Calibri" panose="020F0502020204030204" pitchFamily="34" charset="0"/>
+                <a:ea typeface="Calibri" panose="020F0502020204030204" pitchFamily="34" charset="-122"/>
+                <a:cs typeface="Calibri" panose="020F0502020204030204" pitchFamily="34" charset="-120"/>
               </a:rPr>
               <a:t>CPU latency per image</a:t>
             </a:r>
@@ -4270,13 +4157,12 @@
             <a:avLst/>
           </a:prstGeom>
           <a:noFill/>
-          <a:ln/>
         </p:spPr>
         <p:txBody>
           <a:bodyPr wrap="square" lIns="0" tIns="0" rIns="0" bIns="0" rtlCol="0" anchor="t"/>
           <a:lstStyle/>
           <a:p>
-            <a:pPr indent="0" marL="0">
+            <a:pPr marL="0" indent="0">
               <a:buNone/>
             </a:pPr>
             <a:r>
@@ -4284,11 +4170,11 @@
                 <a:solidFill>
                   <a:srgbClr val="00D9FF"/>
                 </a:solidFill>
-                <a:latin typeface="Cambria" pitchFamily="34" charset="0"/>
-                <a:ea typeface="Cambria" pitchFamily="34" charset="-122"/>
-                <a:cs typeface="Cambria" pitchFamily="34" charset="-120"/>
-              </a:rPr>
-              <a:t>[FILL] MB</a:t>
+                <a:latin typeface="Cambria" panose="02040503050406030204" pitchFamily="34" charset="0"/>
+                <a:ea typeface="Cambria" panose="02040503050406030204" pitchFamily="34" charset="-122"/>
+                <a:cs typeface="Cambria" panose="02040503050406030204" pitchFamily="34" charset="-120"/>
+              </a:rPr>
+              <a:t>9.8MB</a:t>
             </a:r>
             <a:endParaRPr lang="en-US" sz="3600" dirty="0"/>
           </a:p>
@@ -4309,13 +4195,12 @@
             <a:avLst/>
           </a:prstGeom>
           <a:noFill/>
-          <a:ln/>
         </p:spPr>
         <p:txBody>
           <a:bodyPr wrap="square" lIns="0" tIns="0" rIns="0" bIns="0" rtlCol="0" anchor="t"/>
           <a:lstStyle/>
           <a:p>
-            <a:pPr indent="0" marL="0">
+            <a:pPr marL="0" indent="0">
               <a:buNone/>
             </a:pPr>
             <a:r>
@@ -4323,9 +4208,9 @@
                 <a:solidFill>
                   <a:srgbClr val="9FB0BF"/>
                 </a:solidFill>
-                <a:latin typeface="Calibri" pitchFamily="34" charset="0"/>
-                <a:ea typeface="Calibri" pitchFamily="34" charset="-122"/>
-                <a:cs typeface="Calibri" pitchFamily="34" charset="-120"/>
+                <a:latin typeface="Calibri" panose="020F0502020204030204" pitchFamily="34" charset="0"/>
+                <a:ea typeface="Calibri" panose="020F0502020204030204" pitchFamily="34" charset="-122"/>
+                <a:cs typeface="Calibri" panose="020F0502020204030204" pitchFamily="34" charset="-120"/>
               </a:rPr>
               <a:t>Model size</a:t>
             </a:r>
@@ -4348,13 +4233,12 @@
             <a:avLst/>
           </a:prstGeom>
           <a:noFill/>
-          <a:ln/>
         </p:spPr>
         <p:txBody>
           <a:bodyPr wrap="square" lIns="0" tIns="0" rIns="0" bIns="0" rtlCol="0" anchor="t"/>
           <a:lstStyle/>
           <a:p>
-            <a:pPr indent="0" marL="0">
+            <a:pPr marL="0" indent="0">
               <a:buNone/>
             </a:pPr>
             <a:r>
@@ -4362,9 +4246,9 @@
                 <a:solidFill>
                   <a:srgbClr val="9FB0BF"/>
                 </a:solidFill>
-                <a:latin typeface="Calibri" pitchFamily="34" charset="0"/>
-                <a:ea typeface="Calibri" pitchFamily="34" charset="-122"/>
-                <a:cs typeface="Calibri" pitchFamily="34" charset="-120"/>
+                <a:latin typeface="Calibri" panose="020F0502020204030204" pitchFamily="34" charset="0"/>
+                <a:ea typeface="Calibri" panose="020F0502020204030204" pitchFamily="34" charset="-122"/>
+                <a:cs typeface="Calibri" panose="020F0502020204030204" pitchFamily="34" charset="-120"/>
               </a:rPr>
               <a:t>Measured on my Snapdragon laptop with the benchmark script in the repo.</a:t>
             </a:r>
@@ -4382,12 +4266,13 @@
 
 <file path=ppt/slides/slide6.xml><?xml version="1.0" encoding="utf-8"?>
 <p:sld xmlns:a="http://schemas.openxmlformats.org/drawingml/2006/main" xmlns:r="http://schemas.openxmlformats.org/officeDocument/2006/relationships" xmlns:p="http://schemas.openxmlformats.org/presentationml/2006/main">
-  <p:cSld name="Slide 6">
+  <p:cSld>
     <p:bg>
       <p:bgPr>
         <a:solidFill>
           <a:srgbClr val="0F1419"/>
         </a:solidFill>
+        <a:effectLst/>
       </p:bgPr>
     </p:bg>
     <p:spTree>
@@ -4419,13 +4304,12 @@
             <a:avLst/>
           </a:prstGeom>
           <a:noFill/>
-          <a:ln/>
         </p:spPr>
         <p:txBody>
           <a:bodyPr wrap="square" lIns="0" tIns="0" rIns="0" bIns="0" rtlCol="0" anchor="ctr"/>
           <a:lstStyle/>
           <a:p>
-            <a:pPr indent="0" marL="0">
+            <a:pPr marL="0" indent="0">
               <a:buNone/>
             </a:pPr>
             <a:r>
@@ -4433,9 +4317,9 @@
                 <a:solidFill>
                   <a:srgbClr val="F2F5F7"/>
                 </a:solidFill>
-                <a:latin typeface="Cambria" pitchFamily="34" charset="0"/>
-                <a:ea typeface="Cambria" pitchFamily="34" charset="-122"/>
-                <a:cs typeface="Cambria" pitchFamily="34" charset="-120"/>
+                <a:latin typeface="Cambria" panose="02040503050406030204" pitchFamily="34" charset="0"/>
+                <a:ea typeface="Cambria" panose="02040503050406030204" pitchFamily="34" charset="-122"/>
+                <a:cs typeface="Cambria" panose="02040503050406030204" pitchFamily="34" charset="-120"/>
               </a:rPr>
               <a:t>Where it helps</a:t>
             </a:r>
@@ -4510,13 +4394,12 @@
             <a:avLst/>
           </a:prstGeom>
           <a:noFill/>
-          <a:ln/>
         </p:spPr>
         <p:txBody>
           <a:bodyPr wrap="square" lIns="0" tIns="0" rIns="0" bIns="0" rtlCol="0" anchor="ctr"/>
           <a:lstStyle/>
           <a:p>
-            <a:pPr algn="ctr" indent="0" marL="0">
+            <a:pPr marL="0" indent="0" algn="ctr">
               <a:buNone/>
             </a:pPr>
             <a:r>
@@ -4524,9 +4407,9 @@
                 <a:solidFill>
                   <a:srgbClr val="0F1419"/>
                 </a:solidFill>
-                <a:latin typeface="Calibri" pitchFamily="34" charset="0"/>
-                <a:ea typeface="Calibri" pitchFamily="34" charset="-122"/>
-                <a:cs typeface="Calibri" pitchFamily="34" charset="-120"/>
+                <a:latin typeface="Calibri" panose="020F0502020204030204" pitchFamily="34" charset="0"/>
+                <a:ea typeface="Calibri" panose="020F0502020204030204" pitchFamily="34" charset="-122"/>
+                <a:cs typeface="Calibri" panose="020F0502020204030204" pitchFamily="34" charset="-120"/>
               </a:rPr>
               <a:t>1</a:t>
             </a:r>
@@ -4549,13 +4432,12 @@
             <a:avLst/>
           </a:prstGeom>
           <a:noFill/>
-          <a:ln/>
         </p:spPr>
         <p:txBody>
           <a:bodyPr wrap="square" lIns="0" tIns="0" rIns="0" bIns="0" rtlCol="0" anchor="t"/>
           <a:lstStyle/>
           <a:p>
-            <a:pPr indent="0" marL="0">
+            <a:pPr marL="0" indent="0">
               <a:buNone/>
             </a:pPr>
             <a:r>
@@ -4563,9 +4445,9 @@
                 <a:solidFill>
                   <a:srgbClr val="F2F5F7"/>
                 </a:solidFill>
-                <a:latin typeface="Calibri" pitchFamily="34" charset="0"/>
-                <a:ea typeface="Calibri" pitchFamily="34" charset="-122"/>
-                <a:cs typeface="Calibri" pitchFamily="34" charset="-120"/>
+                <a:latin typeface="Calibri" panose="020F0502020204030204" pitchFamily="34" charset="0"/>
+                <a:ea typeface="Calibri" panose="020F0502020204030204" pitchFamily="34" charset="-122"/>
+                <a:cs typeface="Calibri" panose="020F0502020204030204" pitchFamily="34" charset="-120"/>
               </a:rPr>
               <a:t>Schools and campuses</a:t>
             </a:r>
@@ -4588,13 +4470,12 @@
             <a:avLst/>
           </a:prstGeom>
           <a:noFill/>
-          <a:ln/>
         </p:spPr>
         <p:txBody>
           <a:bodyPr wrap="square" lIns="0" tIns="0" rIns="0" bIns="0" rtlCol="0" anchor="t"/>
           <a:lstStyle/>
           <a:p>
-            <a:pPr indent="0" marL="0">
+            <a:pPr marL="0" indent="0">
               <a:buNone/>
             </a:pPr>
             <a:r>
@@ -4602,9 +4483,9 @@
                 <a:solidFill>
                   <a:srgbClr val="9FB0BF"/>
                 </a:solidFill>
-                <a:latin typeface="Calibri" pitchFamily="34" charset="0"/>
-                <a:ea typeface="Calibri" pitchFamily="34" charset="-122"/>
-                <a:cs typeface="Calibri" pitchFamily="34" charset="-120"/>
+                <a:latin typeface="Calibri" panose="020F0502020204030204" pitchFamily="34" charset="0"/>
+                <a:ea typeface="Calibri" panose="020F0502020204030204" pitchFamily="34" charset="-122"/>
+                <a:cs typeface="Calibri" panose="020F0502020204030204" pitchFamily="34" charset="-120"/>
               </a:rPr>
               <a:t>Teach correct sorting with instant feedback and a class leaderboard.</a:t>
             </a:r>
@@ -4679,13 +4560,12 @@
             <a:avLst/>
           </a:prstGeom>
           <a:noFill/>
-          <a:ln/>
         </p:spPr>
         <p:txBody>
           <a:bodyPr wrap="square" lIns="0" tIns="0" rIns="0" bIns="0" rtlCol="0" anchor="ctr"/>
           <a:lstStyle/>
           <a:p>
-            <a:pPr algn="ctr" indent="0" marL="0">
+            <a:pPr marL="0" indent="0" algn="ctr">
               <a:buNone/>
             </a:pPr>
             <a:r>
@@ -4693,9 +4573,9 @@
                 <a:solidFill>
                   <a:srgbClr val="0F1419"/>
                 </a:solidFill>
-                <a:latin typeface="Calibri" pitchFamily="34" charset="0"/>
-                <a:ea typeface="Calibri" pitchFamily="34" charset="-122"/>
-                <a:cs typeface="Calibri" pitchFamily="34" charset="-120"/>
+                <a:latin typeface="Calibri" panose="020F0502020204030204" pitchFamily="34" charset="0"/>
+                <a:ea typeface="Calibri" panose="020F0502020204030204" pitchFamily="34" charset="-122"/>
+                <a:cs typeface="Calibri" panose="020F0502020204030204" pitchFamily="34" charset="-120"/>
               </a:rPr>
               <a:t>2</a:t>
             </a:r>
@@ -4718,13 +4598,12 @@
             <a:avLst/>
           </a:prstGeom>
           <a:noFill/>
-          <a:ln/>
         </p:spPr>
         <p:txBody>
           <a:bodyPr wrap="square" lIns="0" tIns="0" rIns="0" bIns="0" rtlCol="0" anchor="t"/>
           <a:lstStyle/>
           <a:p>
-            <a:pPr indent="0" marL="0">
+            <a:pPr marL="0" indent="0">
               <a:buNone/>
             </a:pPr>
             <a:r>
@@ -4732,9 +4611,9 @@
                 <a:solidFill>
                   <a:srgbClr val="F2F5F7"/>
                 </a:solidFill>
-                <a:latin typeface="Calibri" pitchFamily="34" charset="0"/>
-                <a:ea typeface="Calibri" pitchFamily="34" charset="-122"/>
-                <a:cs typeface="Calibri" pitchFamily="34" charset="-120"/>
+                <a:latin typeface="Calibri" panose="020F0502020204030204" pitchFamily="34" charset="0"/>
+                <a:ea typeface="Calibri" panose="020F0502020204030204" pitchFamily="34" charset="-122"/>
+                <a:cs typeface="Calibri" panose="020F0502020204030204" pitchFamily="34" charset="-120"/>
               </a:rPr>
               <a:t>Offices and facilities</a:t>
             </a:r>
@@ -4757,13 +4636,12 @@
             <a:avLst/>
           </a:prstGeom>
           <a:noFill/>
-          <a:ln/>
         </p:spPr>
         <p:txBody>
           <a:bodyPr wrap="square" lIns="0" tIns="0" rIns="0" bIns="0" rtlCol="0" anchor="t"/>
           <a:lstStyle/>
           <a:p>
-            <a:pPr indent="0" marL="0">
+            <a:pPr marL="0" indent="0">
               <a:buNone/>
             </a:pPr>
             <a:r>
@@ -4771,9 +4649,9 @@
                 <a:solidFill>
                   <a:srgbClr val="9FB0BF"/>
                 </a:solidFill>
-                <a:latin typeface="Calibri" pitchFamily="34" charset="0"/>
-                <a:ea typeface="Calibri" pitchFamily="34" charset="-122"/>
-                <a:cs typeface="Calibri" pitchFamily="34" charset="-120"/>
+                <a:latin typeface="Calibri" panose="020F0502020204030204" pitchFamily="34" charset="0"/>
+                <a:ea typeface="Calibri" panose="020F0502020204030204" pitchFamily="34" charset="-122"/>
+                <a:cs typeface="Calibri" panose="020F0502020204030204" pitchFamily="34" charset="-120"/>
               </a:rPr>
               <a:t>Cut contamination at shared bins without extra hardware.</a:t>
             </a:r>
@@ -4848,13 +4726,12 @@
             <a:avLst/>
           </a:prstGeom>
           <a:noFill/>
-          <a:ln/>
         </p:spPr>
         <p:txBody>
           <a:bodyPr wrap="square" lIns="0" tIns="0" rIns="0" bIns="0" rtlCol="0" anchor="ctr"/>
           <a:lstStyle/>
           <a:p>
-            <a:pPr algn="ctr" indent="0" marL="0">
+            <a:pPr marL="0" indent="0" algn="ctr">
               <a:buNone/>
             </a:pPr>
             <a:r>
@@ -4862,9 +4739,9 @@
                 <a:solidFill>
                   <a:srgbClr val="0F1419"/>
                 </a:solidFill>
-                <a:latin typeface="Calibri" pitchFamily="34" charset="0"/>
-                <a:ea typeface="Calibri" pitchFamily="34" charset="-122"/>
-                <a:cs typeface="Calibri" pitchFamily="34" charset="-120"/>
+                <a:latin typeface="Calibri" panose="020F0502020204030204" pitchFamily="34" charset="0"/>
+                <a:ea typeface="Calibri" panose="020F0502020204030204" pitchFamily="34" charset="-122"/>
+                <a:cs typeface="Calibri" panose="020F0502020204030204" pitchFamily="34" charset="-120"/>
               </a:rPr>
               <a:t>3</a:t>
             </a:r>
@@ -4887,13 +4764,12 @@
             <a:avLst/>
           </a:prstGeom>
           <a:noFill/>
-          <a:ln/>
         </p:spPr>
         <p:txBody>
           <a:bodyPr wrap="square" lIns="0" tIns="0" rIns="0" bIns="0" rtlCol="0" anchor="t"/>
           <a:lstStyle/>
           <a:p>
-            <a:pPr indent="0" marL="0">
+            <a:pPr marL="0" indent="0">
               <a:buNone/>
             </a:pPr>
             <a:r>
@@ -4901,9 +4777,9 @@
                 <a:solidFill>
                   <a:srgbClr val="F2F5F7"/>
                 </a:solidFill>
-                <a:latin typeface="Calibri" pitchFamily="34" charset="0"/>
-                <a:ea typeface="Calibri" pitchFamily="34" charset="-122"/>
-                <a:cs typeface="Calibri" pitchFamily="34" charset="-120"/>
+                <a:latin typeface="Calibri" panose="020F0502020204030204" pitchFamily="34" charset="0"/>
+                <a:ea typeface="Calibri" panose="020F0502020204030204" pitchFamily="34" charset="-122"/>
+                <a:cs typeface="Calibri" panose="020F0502020204030204" pitchFamily="34" charset="-120"/>
               </a:rPr>
               <a:t>Low-connectivity places</a:t>
             </a:r>
@@ -4926,13 +4802,12 @@
             <a:avLst/>
           </a:prstGeom>
           <a:noFill/>
-          <a:ln/>
         </p:spPr>
         <p:txBody>
           <a:bodyPr wrap="square" lIns="0" tIns="0" rIns="0" bIns="0" rtlCol="0" anchor="t"/>
           <a:lstStyle/>
           <a:p>
-            <a:pPr indent="0" marL="0">
+            <a:pPr marL="0" indent="0">
               <a:buNone/>
             </a:pPr>
             <a:r>
@@ -4940,9 +4815,9 @@
                 <a:solidFill>
                   <a:srgbClr val="9FB0BF"/>
                 </a:solidFill>
-                <a:latin typeface="Calibri" pitchFamily="34" charset="0"/>
-                <a:ea typeface="Calibri" pitchFamily="34" charset="-122"/>
-                <a:cs typeface="Calibri" pitchFamily="34" charset="-120"/>
+                <a:latin typeface="Calibri" panose="020F0502020204030204" pitchFamily="34" charset="0"/>
+                <a:ea typeface="Calibri" panose="020F0502020204030204" pitchFamily="34" charset="-122"/>
+                <a:cs typeface="Calibri" panose="020F0502020204030204" pitchFamily="34" charset="-120"/>
               </a:rPr>
               <a:t>Works fully offline after setup, so no signal is needed.</a:t>
             </a:r>
@@ -5017,13 +4892,12 @@
             <a:avLst/>
           </a:prstGeom>
           <a:noFill/>
-          <a:ln/>
         </p:spPr>
         <p:txBody>
           <a:bodyPr wrap="square" lIns="0" tIns="0" rIns="0" bIns="0" rtlCol="0" anchor="ctr"/>
           <a:lstStyle/>
           <a:p>
-            <a:pPr algn="ctr" indent="0" marL="0">
+            <a:pPr marL="0" indent="0" algn="ctr">
               <a:buNone/>
             </a:pPr>
             <a:r>
@@ -5031,9 +4905,9 @@
                 <a:solidFill>
                   <a:srgbClr val="0F1419"/>
                 </a:solidFill>
-                <a:latin typeface="Calibri" pitchFamily="34" charset="0"/>
-                <a:ea typeface="Calibri" pitchFamily="34" charset="-122"/>
-                <a:cs typeface="Calibri" pitchFamily="34" charset="-120"/>
+                <a:latin typeface="Calibri" panose="020F0502020204030204" pitchFamily="34" charset="0"/>
+                <a:ea typeface="Calibri" panose="020F0502020204030204" pitchFamily="34" charset="-122"/>
+                <a:cs typeface="Calibri" panose="020F0502020204030204" pitchFamily="34" charset="-120"/>
               </a:rPr>
               <a:t>4</a:t>
             </a:r>
@@ -5056,13 +4930,12 @@
             <a:avLst/>
           </a:prstGeom>
           <a:noFill/>
-          <a:ln/>
         </p:spPr>
         <p:txBody>
           <a:bodyPr wrap="square" lIns="0" tIns="0" rIns="0" bIns="0" rtlCol="0" anchor="t"/>
           <a:lstStyle/>
           <a:p>
-            <a:pPr indent="0" marL="0">
+            <a:pPr marL="0" indent="0">
               <a:buNone/>
             </a:pPr>
             <a:r>
@@ -5070,9 +4943,9 @@
                 <a:solidFill>
                   <a:srgbClr val="F2F5F7"/>
                 </a:solidFill>
-                <a:latin typeface="Calibri" pitchFamily="34" charset="0"/>
-                <a:ea typeface="Calibri" pitchFamily="34" charset="-122"/>
-                <a:cs typeface="Calibri" pitchFamily="34" charset="-120"/>
+                <a:latin typeface="Calibri" panose="020F0502020204030204" pitchFamily="34" charset="0"/>
+                <a:ea typeface="Calibri" panose="020F0502020204030204" pitchFamily="34" charset="-122"/>
+                <a:cs typeface="Calibri" panose="020F0502020204030204" pitchFamily="34" charset="-120"/>
               </a:rPr>
               <a:t>Privacy by design</a:t>
             </a:r>
@@ -5095,13 +4968,12 @@
             <a:avLst/>
           </a:prstGeom>
           <a:noFill/>
-          <a:ln/>
         </p:spPr>
         <p:txBody>
           <a:bodyPr wrap="square" lIns="0" tIns="0" rIns="0" bIns="0" rtlCol="0" anchor="t"/>
           <a:lstStyle/>
           <a:p>
-            <a:pPr indent="0" marL="0">
+            <a:pPr marL="0" indent="0">
               <a:buNone/>
             </a:pPr>
             <a:r>
@@ -5109,9 +4981,9 @@
                 <a:solidFill>
                   <a:srgbClr val="9FB0BF"/>
                 </a:solidFill>
-                <a:latin typeface="Calibri" pitchFamily="34" charset="0"/>
-                <a:ea typeface="Calibri" pitchFamily="34" charset="-122"/>
-                <a:cs typeface="Calibri" pitchFamily="34" charset="-120"/>
+                <a:latin typeface="Calibri" panose="020F0502020204030204" pitchFamily="34" charset="0"/>
+                <a:ea typeface="Calibri" panose="020F0502020204030204" pitchFamily="34" charset="-122"/>
+                <a:cs typeface="Calibri" panose="020F0502020204030204" pitchFamily="34" charset="-120"/>
               </a:rPr>
               <a:t>Photos are processed on the device and never uploaded.</a:t>
             </a:r>
@@ -5129,12 +5001,13 @@
 
 <file path=ppt/slides/slide7.xml><?xml version="1.0" encoding="utf-8"?>
 <p:sld xmlns:a="http://schemas.openxmlformats.org/drawingml/2006/main" xmlns:r="http://schemas.openxmlformats.org/officeDocument/2006/relationships" xmlns:p="http://schemas.openxmlformats.org/presentationml/2006/main">
-  <p:cSld name="Slide 7">
+  <p:cSld>
     <p:bg>
       <p:bgPr>
         <a:solidFill>
           <a:srgbClr val="0F1419"/>
         </a:solidFill>
+        <a:effectLst/>
       </p:bgPr>
     </p:bg>
     <p:spTree>
@@ -5166,13 +5039,12 @@
             <a:avLst/>
           </a:prstGeom>
           <a:noFill/>
-          <a:ln/>
         </p:spPr>
         <p:txBody>
           <a:bodyPr wrap="square" lIns="0" tIns="0" rIns="0" bIns="0" rtlCol="0" anchor="ctr"/>
           <a:lstStyle/>
           <a:p>
-            <a:pPr indent="0" marL="0">
+            <a:pPr marL="0" indent="0">
               <a:buNone/>
             </a:pPr>
             <a:r>
@@ -5180,9 +5052,9 @@
                 <a:solidFill>
                   <a:srgbClr val="F2F5F7"/>
                 </a:solidFill>
-                <a:latin typeface="Cambria" pitchFamily="34" charset="0"/>
-                <a:ea typeface="Cambria" pitchFamily="34" charset="-122"/>
-                <a:cs typeface="Cambria" pitchFamily="34" charset="-120"/>
+                <a:latin typeface="Cambria" panose="02040503050406030204" pitchFamily="34" charset="0"/>
+                <a:ea typeface="Cambria" panose="02040503050406030204" pitchFamily="34" charset="-122"/>
+                <a:cs typeface="Cambria" panose="02040503050406030204" pitchFamily="34" charset="-120"/>
               </a:rPr>
               <a:t>What comes next</a:t>
             </a:r>
@@ -5230,13 +5102,12 @@
             <a:avLst/>
           </a:prstGeom>
           <a:noFill/>
-          <a:ln/>
         </p:spPr>
         <p:txBody>
           <a:bodyPr wrap="square" lIns="0" tIns="0" rIns="0" bIns="0" rtlCol="0" anchor="ctr"/>
           <a:lstStyle/>
           <a:p>
-            <a:pPr algn="ctr" indent="0" marL="0">
+            <a:pPr marL="0" indent="0" algn="ctr">
               <a:buNone/>
             </a:pPr>
             <a:r>
@@ -5244,9 +5115,9 @@
                 <a:solidFill>
                   <a:srgbClr val="0F1419"/>
                 </a:solidFill>
-                <a:latin typeface="Calibri" pitchFamily="34" charset="0"/>
-                <a:ea typeface="Calibri" pitchFamily="34" charset="-122"/>
-                <a:cs typeface="Calibri" pitchFamily="34" charset="-120"/>
+                <a:latin typeface="Calibri" panose="020F0502020204030204" pitchFamily="34" charset="0"/>
+                <a:ea typeface="Calibri" panose="020F0502020204030204" pitchFamily="34" charset="-122"/>
+                <a:cs typeface="Calibri" panose="020F0502020204030204" pitchFamily="34" charset="-120"/>
               </a:rPr>
               <a:t>1</a:t>
             </a:r>
@@ -5269,13 +5140,12 @@
             <a:avLst/>
           </a:prstGeom>
           <a:noFill/>
-          <a:ln/>
         </p:spPr>
         <p:txBody>
           <a:bodyPr wrap="square" lIns="0" tIns="0" rIns="0" bIns="0" rtlCol="0" anchor="t"/>
           <a:lstStyle/>
           <a:p>
-            <a:pPr indent="0" marL="0">
+            <a:pPr marL="0" indent="0">
               <a:buNone/>
             </a:pPr>
             <a:r>
@@ -5283,9 +5153,9 @@
                 <a:solidFill>
                   <a:srgbClr val="F2F5F7"/>
                 </a:solidFill>
-                <a:latin typeface="Calibri" pitchFamily="34" charset="0"/>
-                <a:ea typeface="Calibri" pitchFamily="34" charset="-122"/>
-                <a:cs typeface="Calibri" pitchFamily="34" charset="-120"/>
+                <a:latin typeface="Calibri" panose="020F0502020204030204" pitchFamily="34" charset="0"/>
+                <a:ea typeface="Calibri" panose="020F0502020204030204" pitchFamily="34" charset="-122"/>
+                <a:cs typeface="Calibri" panose="020F0502020204030204" pitchFamily="34" charset="-120"/>
               </a:rPr>
               <a:t>Multi-object detection</a:t>
             </a:r>
@@ -5308,13 +5178,12 @@
             <a:avLst/>
           </a:prstGeom>
           <a:noFill/>
-          <a:ln/>
         </p:spPr>
         <p:txBody>
           <a:bodyPr wrap="square" lIns="0" tIns="0" rIns="0" bIns="0" rtlCol="0" anchor="t"/>
           <a:lstStyle/>
           <a:p>
-            <a:pPr indent="0" marL="0">
+            <a:pPr marL="0" indent="0">
               <a:buNone/>
             </a:pPr>
             <a:r>
@@ -5322,9 +5191,9 @@
                 <a:solidFill>
                   <a:srgbClr val="9FB0BF"/>
                 </a:solidFill>
-                <a:latin typeface="Calibri" pitchFamily="34" charset="0"/>
-                <a:ea typeface="Calibri" pitchFamily="34" charset="-122"/>
-                <a:cs typeface="Calibri" pitchFamily="34" charset="-120"/>
+                <a:latin typeface="Calibri" panose="020F0502020204030204" pitchFamily="34" charset="0"/>
+                <a:ea typeface="Calibri" panose="020F0502020204030204" pitchFamily="34" charset="-122"/>
+                <a:cs typeface="Calibri" panose="020F0502020204030204" pitchFamily="34" charset="-120"/>
               </a:rPr>
               <a:t>Sort several items in one frame.</a:t>
             </a:r>
@@ -5372,13 +5241,12 @@
             <a:avLst/>
           </a:prstGeom>
           <a:noFill/>
-          <a:ln/>
         </p:spPr>
         <p:txBody>
           <a:bodyPr wrap="square" lIns="0" tIns="0" rIns="0" bIns="0" rtlCol="0" anchor="ctr"/>
           <a:lstStyle/>
           <a:p>
-            <a:pPr algn="ctr" indent="0" marL="0">
+            <a:pPr marL="0" indent="0" algn="ctr">
               <a:buNone/>
             </a:pPr>
             <a:r>
@@ -5386,9 +5254,9 @@
                 <a:solidFill>
                   <a:srgbClr val="0F1419"/>
                 </a:solidFill>
-                <a:latin typeface="Calibri" pitchFamily="34" charset="0"/>
-                <a:ea typeface="Calibri" pitchFamily="34" charset="-122"/>
-                <a:cs typeface="Calibri" pitchFamily="34" charset="-120"/>
+                <a:latin typeface="Calibri" panose="020F0502020204030204" pitchFamily="34" charset="0"/>
+                <a:ea typeface="Calibri" panose="020F0502020204030204" pitchFamily="34" charset="-122"/>
+                <a:cs typeface="Calibri" panose="020F0502020204030204" pitchFamily="34" charset="-120"/>
               </a:rPr>
               <a:t>2</a:t>
             </a:r>
@@ -5411,13 +5279,12 @@
             <a:avLst/>
           </a:prstGeom>
           <a:noFill/>
-          <a:ln/>
         </p:spPr>
         <p:txBody>
           <a:bodyPr wrap="square" lIns="0" tIns="0" rIns="0" bIns="0" rtlCol="0" anchor="t"/>
           <a:lstStyle/>
           <a:p>
-            <a:pPr indent="0" marL="0">
+            <a:pPr marL="0" indent="0">
               <a:buNone/>
             </a:pPr>
             <a:r>
@@ -5425,9 +5292,9 @@
                 <a:solidFill>
                   <a:srgbClr val="F2F5F7"/>
                 </a:solidFill>
-                <a:latin typeface="Calibri" pitchFamily="34" charset="0"/>
-                <a:ea typeface="Calibri" pitchFamily="34" charset="-122"/>
-                <a:cs typeface="Calibri" pitchFamily="34" charset="-120"/>
+                <a:latin typeface="Calibri" panose="020F0502020204030204" pitchFamily="34" charset="0"/>
+                <a:ea typeface="Calibri" panose="020F0502020204030204" pitchFamily="34" charset="-122"/>
+                <a:cs typeface="Calibri" panose="020F0502020204030204" pitchFamily="34" charset="-120"/>
               </a:rPr>
               <a:t>Regional bin rules</a:t>
             </a:r>
@@ -5450,13 +5317,12 @@
             <a:avLst/>
           </a:prstGeom>
           <a:noFill/>
-          <a:ln/>
         </p:spPr>
         <p:txBody>
           <a:bodyPr wrap="square" lIns="0" tIns="0" rIns="0" bIns="0" rtlCol="0" anchor="t"/>
           <a:lstStyle/>
           <a:p>
-            <a:pPr indent="0" marL="0">
+            <a:pPr marL="0" indent="0">
               <a:buNone/>
             </a:pPr>
             <a:r>
@@ -5464,9 +5330,9 @@
                 <a:solidFill>
                   <a:srgbClr val="9FB0BF"/>
                 </a:solidFill>
-                <a:latin typeface="Calibri" pitchFamily="34" charset="0"/>
-                <a:ea typeface="Calibri" pitchFamily="34" charset="-122"/>
-                <a:cs typeface="Calibri" pitchFamily="34" charset="-120"/>
+                <a:latin typeface="Calibri" panose="020F0502020204030204" pitchFamily="34" charset="0"/>
+                <a:ea typeface="Calibri" panose="020F0502020204030204" pitchFamily="34" charset="-122"/>
+                <a:cs typeface="Calibri" panose="020F0502020204030204" pitchFamily="34" charset="-120"/>
               </a:rPr>
               <a:t>Match local recycling regulations.</a:t>
             </a:r>
@@ -5514,13 +5380,12 @@
             <a:avLst/>
           </a:prstGeom>
           <a:noFill/>
-          <a:ln/>
         </p:spPr>
         <p:txBody>
           <a:bodyPr wrap="square" lIns="0" tIns="0" rIns="0" bIns="0" rtlCol="0" anchor="ctr"/>
           <a:lstStyle/>
           <a:p>
-            <a:pPr algn="ctr" indent="0" marL="0">
+            <a:pPr marL="0" indent="0" algn="ctr">
               <a:buNone/>
             </a:pPr>
             <a:r>
@@ -5528,9 +5393,9 @@
                 <a:solidFill>
                   <a:srgbClr val="0F1419"/>
                 </a:solidFill>
-                <a:latin typeface="Calibri" pitchFamily="34" charset="0"/>
-                <a:ea typeface="Calibri" pitchFamily="34" charset="-122"/>
-                <a:cs typeface="Calibri" pitchFamily="34" charset="-120"/>
+                <a:latin typeface="Calibri" panose="020F0502020204030204" pitchFamily="34" charset="0"/>
+                <a:ea typeface="Calibri" panose="020F0502020204030204" pitchFamily="34" charset="-122"/>
+                <a:cs typeface="Calibri" panose="020F0502020204030204" pitchFamily="34" charset="-120"/>
               </a:rPr>
               <a:t>3</a:t>
             </a:r>
@@ -5553,13 +5418,12 @@
             <a:avLst/>
           </a:prstGeom>
           <a:noFill/>
-          <a:ln/>
         </p:spPr>
         <p:txBody>
           <a:bodyPr wrap="square" lIns="0" tIns="0" rIns="0" bIns="0" rtlCol="0" anchor="t"/>
           <a:lstStyle/>
           <a:p>
-            <a:pPr indent="0" marL="0">
+            <a:pPr marL="0" indent="0">
               <a:buNone/>
             </a:pPr>
             <a:r>
@@ -5567,9 +5431,9 @@
                 <a:solidFill>
                   <a:srgbClr val="F2F5F7"/>
                 </a:solidFill>
-                <a:latin typeface="Calibri" pitchFamily="34" charset="0"/>
-                <a:ea typeface="Calibri" pitchFamily="34" charset="-122"/>
-                <a:cs typeface="Calibri" pitchFamily="34" charset="-120"/>
+                <a:latin typeface="Calibri" panose="020F0502020204030204" pitchFamily="34" charset="0"/>
+                <a:ea typeface="Calibri" panose="020F0502020204030204" pitchFamily="34" charset="-122"/>
+                <a:cs typeface="Calibri" panose="020F0502020204030204" pitchFamily="34" charset="-120"/>
               </a:rPr>
               <a:t>Mobile companion</a:t>
             </a:r>
@@ -5592,13 +5456,12 @@
             <a:avLst/>
           </a:prstGeom>
           <a:noFill/>
-          <a:ln/>
         </p:spPr>
         <p:txBody>
           <a:bodyPr wrap="square" lIns="0" tIns="0" rIns="0" bIns="0" rtlCol="0" anchor="t"/>
           <a:lstStyle/>
           <a:p>
-            <a:pPr indent="0" marL="0">
+            <a:pPr marL="0" indent="0">
               <a:buNone/>
             </a:pPr>
             <a:r>
@@ -5606,9 +5469,9 @@
                 <a:solidFill>
                   <a:srgbClr val="9FB0BF"/>
                 </a:solidFill>
-                <a:latin typeface="Calibri" pitchFamily="34" charset="0"/>
-                <a:ea typeface="Calibri" pitchFamily="34" charset="-122"/>
-                <a:cs typeface="Calibri" pitchFamily="34" charset="-120"/>
+                <a:latin typeface="Calibri" panose="020F0502020204030204" pitchFamily="34" charset="0"/>
+                <a:ea typeface="Calibri" panose="020F0502020204030204" pitchFamily="34" charset="-122"/>
+                <a:cs typeface="Calibri" panose="020F0502020204030204" pitchFamily="34" charset="-120"/>
               </a:rPr>
               <a:t>Sync scores and history from a phone.</a:t>
             </a:r>
@@ -5658,13 +5521,12 @@
             <a:avLst/>
           </a:prstGeom>
           <a:noFill/>
-          <a:ln/>
         </p:spPr>
         <p:txBody>
           <a:bodyPr wrap="square" lIns="0" tIns="0" rIns="0" bIns="0" rtlCol="0" anchor="t"/>
           <a:lstStyle/>
           <a:p>
-            <a:pPr indent="0" marL="0">
+            <a:pPr marL="0" indent="0">
               <a:buNone/>
             </a:pPr>
             <a:r>
@@ -5672,9 +5534,9 @@
                 <a:solidFill>
                   <a:srgbClr val="F2F5F7"/>
                 </a:solidFill>
-                <a:latin typeface="Calibri" pitchFamily="34" charset="0"/>
-                <a:ea typeface="Calibri" pitchFamily="34" charset="-122"/>
-                <a:cs typeface="Calibri" pitchFamily="34" charset="-120"/>
+                <a:latin typeface="Calibri" panose="020F0502020204030204" pitchFamily="34" charset="0"/>
+                <a:ea typeface="Calibri" panose="020F0502020204030204" pitchFamily="34" charset="-122"/>
+                <a:cs typeface="Calibri" panose="020F0502020204030204" pitchFamily="34" charset="-120"/>
               </a:rPr>
               <a:t>Abdul Raheem F.</a:t>
             </a:r>
@@ -5697,13 +5559,12 @@
             <a:avLst/>
           </a:prstGeom>
           <a:noFill/>
-          <a:ln/>
         </p:spPr>
         <p:txBody>
           <a:bodyPr wrap="square" lIns="0" tIns="0" rIns="0" bIns="0" rtlCol="0" anchor="t"/>
           <a:lstStyle/>
           <a:p>
-            <a:pPr indent="0" marL="0">
+            <a:pPr marL="0" indent="0">
               <a:buNone/>
             </a:pPr>
             <a:r>
@@ -5711,9 +5572,9 @@
                 <a:solidFill>
                   <a:srgbClr val="9FB0BF"/>
                 </a:solidFill>
-                <a:latin typeface="Calibri" pitchFamily="34" charset="0"/>
-                <a:ea typeface="Calibri" pitchFamily="34" charset="-122"/>
-                <a:cs typeface="Calibri" pitchFamily="34" charset="-120"/>
+                <a:latin typeface="Calibri" panose="020F0502020204030204" pitchFamily="34" charset="0"/>
+                <a:ea typeface="Calibri" panose="020F0502020204030204" pitchFamily="34" charset="-122"/>
+                <a:cs typeface="Calibri" panose="020F0502020204030204" pitchFamily="34" charset="-120"/>
               </a:rPr>
               <a:t>Final-year B.Tech, Artificial Intelligence &amp; Data Science</a:t>
             </a:r>
@@ -5736,13 +5597,12 @@
             <a:avLst/>
           </a:prstGeom>
           <a:noFill/>
-          <a:ln/>
         </p:spPr>
         <p:txBody>
           <a:bodyPr wrap="square" lIns="0" tIns="0" rIns="0" bIns="0" rtlCol="0" anchor="t"/>
           <a:lstStyle/>
           <a:p>
-            <a:pPr indent="0" marL="0">
+            <a:pPr marL="0" indent="0">
               <a:buNone/>
             </a:pPr>
             <a:r>
@@ -5750,9 +5610,9 @@
                 <a:solidFill>
                   <a:srgbClr val="9FB0BF"/>
                 </a:solidFill>
-                <a:latin typeface="Calibri" pitchFamily="34" charset="0"/>
-                <a:ea typeface="Calibri" pitchFamily="34" charset="-122"/>
-                <a:cs typeface="Calibri" pitchFamily="34" charset="-120"/>
+                <a:latin typeface="Calibri" panose="020F0502020204030204" pitchFamily="34" charset="0"/>
+                <a:ea typeface="Calibri" panose="020F0502020204030204" pitchFamily="34" charset="-122"/>
+                <a:cs typeface="Calibri" panose="020F0502020204030204" pitchFamily="34" charset="-120"/>
               </a:rPr>
               <a:t>K. Ramakrishnan College of Technology, Trichy</a:t>
             </a:r>
@@ -5775,13 +5635,12 @@
             <a:avLst/>
           </a:prstGeom>
           <a:noFill/>
-          <a:ln/>
         </p:spPr>
         <p:txBody>
           <a:bodyPr wrap="square" lIns="0" tIns="0" rIns="0" bIns="0" rtlCol="0" anchor="t"/>
           <a:lstStyle/>
           <a:p>
-            <a:pPr indent="0" marL="0">
+            <a:pPr marL="0" indent="0">
               <a:buNone/>
             </a:pPr>
             <a:r>
@@ -5789,9 +5648,9 @@
                 <a:solidFill>
                   <a:srgbClr val="00D9FF"/>
                 </a:solidFill>
-                <a:latin typeface="Calibri" pitchFamily="34" charset="0"/>
-                <a:ea typeface="Calibri" pitchFamily="34" charset="-122"/>
-                <a:cs typeface="Calibri" pitchFamily="34" charset="-120"/>
+                <a:latin typeface="Calibri" panose="020F0502020204030204" pitchFamily="34" charset="0"/>
+                <a:ea typeface="Calibri" panose="020F0502020204030204" pitchFamily="34" charset="-122"/>
+                <a:cs typeface="Calibri" panose="020F0502020204030204" pitchFamily="34" charset="-120"/>
               </a:rPr>
               <a:t>github.com/abdulraheem2006</a:t>
             </a:r>
@@ -5814,13 +5673,12 @@
             <a:avLst/>
           </a:prstGeom>
           <a:noFill/>
-          <a:ln/>
         </p:spPr>
         <p:txBody>
           <a:bodyPr wrap="square" lIns="0" tIns="0" rIns="0" bIns="0" rtlCol="0" anchor="t"/>
           <a:lstStyle/>
           <a:p>
-            <a:pPr indent="0" marL="0">
+            <a:pPr marL="0" indent="0">
               <a:buNone/>
             </a:pPr>
             <a:r>
@@ -5828,9 +5686,9 @@
                 <a:solidFill>
                   <a:srgbClr val="00D9FF"/>
                 </a:solidFill>
-                <a:latin typeface="Calibri" pitchFamily="34" charset="0"/>
-                <a:ea typeface="Calibri" pitchFamily="34" charset="-122"/>
-                <a:cs typeface="Calibri" pitchFamily="34" charset="-120"/>
+                <a:latin typeface="Calibri" panose="020F0502020204030204" pitchFamily="34" charset="0"/>
+                <a:ea typeface="Calibri" panose="020F0502020204030204" pitchFamily="34" charset="-122"/>
+                <a:cs typeface="Calibri" panose="020F0502020204030204" pitchFamily="34" charset="-120"/>
               </a:rPr>
               <a:t>Thank you.</a:t>
             </a:r>
@@ -5889,7 +5747,7 @@
     </a:clrScheme>
     <a:fontScheme name="Office">
       <a:majorFont>
-        <a:latin typeface="Calibri Light" panose="020F0302020204030204"/>
+        <a:latin typeface="Calibri Light"/>
         <a:ea typeface=""/>
         <a:cs typeface=""/>
         <a:font script="Jpan" typeface="游ゴシック Light"/>
@@ -5922,26 +5780,9 @@
         <a:font script="Viet" typeface="Times New Roman"/>
         <a:font script="Uigh" typeface="Microsoft Uighur"/>
         <a:font script="Geor" typeface="Sylfaen"/>
-        <a:font script="Armn" typeface="Arial"/>
-        <a:font script="Bugi" typeface="Leelawadee UI"/>
-        <a:font script="Bopo" typeface="Microsoft JhengHei"/>
-        <a:font script="Java" typeface="Javanese Text"/>
-        <a:font script="Lisu" typeface="Segoe UI"/>
-        <a:font script="Mymr" typeface="Myanmar Text"/>
-        <a:font script="Nkoo" typeface="Ebrima"/>
-        <a:font script="Olck" typeface="Nirmala UI"/>
-        <a:font script="Osma" typeface="Ebrima"/>
-        <a:font script="Phag" typeface="Phagspa"/>
-        <a:font script="Syrn" typeface="Estrangelo Edessa"/>
-        <a:font script="Syrj" typeface="Estrangelo Edessa"/>
-        <a:font script="Syre" typeface="Estrangelo Edessa"/>
-        <a:font script="Sora" typeface="Nirmala UI"/>
-        <a:font script="Tale" typeface="Microsoft Tai Le"/>
-        <a:font script="Talu" typeface="Microsoft New Tai Lue"/>
-        <a:font script="Tfng" typeface="Ebrima"/>
       </a:majorFont>
       <a:minorFont>
-        <a:latin typeface="Calibri" panose="020F0502020204030204"/>
+        <a:latin typeface="Calibri"/>
         <a:ea typeface=""/>
         <a:cs typeface=""/>
         <a:font script="Jpan" typeface="游ゴシック"/>
@@ -5974,23 +5815,6 @@
         <a:font script="Viet" typeface="Arial"/>
         <a:font script="Uigh" typeface="Microsoft Uighur"/>
         <a:font script="Geor" typeface="Sylfaen"/>
-        <a:font script="Armn" typeface="Arial"/>
-        <a:font script="Bugi" typeface="Leelawadee UI"/>
-        <a:font script="Bopo" typeface="Microsoft JhengHei"/>
-        <a:font script="Java" typeface="Javanese Text"/>
-        <a:font script="Lisu" typeface="Segoe UI"/>
-        <a:font script="Mymr" typeface="Myanmar Text"/>
-        <a:font script="Nkoo" typeface="Ebrima"/>
-        <a:font script="Olck" typeface="Nirmala UI"/>
-        <a:font script="Osma" typeface="Ebrima"/>
-        <a:font script="Phag" typeface="Phagspa"/>
-        <a:font script="Syrn" typeface="Estrangelo Edessa"/>
-        <a:font script="Syrj" typeface="Estrangelo Edessa"/>
-        <a:font script="Syre" typeface="Estrangelo Edessa"/>
-        <a:font script="Sora" typeface="Nirmala UI"/>
-        <a:font script="Tale" typeface="Microsoft Tai Le"/>
-        <a:font script="Talu" typeface="Microsoft New Tai Lue"/>
-        <a:font script="Tfng" typeface="Ebrima"/>
       </a:minorFont>
     </a:fontScheme>
     <a:fmtScheme name="Office">
@@ -6131,8 +5955,265 @@
       </a:bgFillStyleLst>
     </a:fmtScheme>
   </a:themeElements>
-  <a:objectDefaults/>
-  <a:extraClrSchemeLst/>
+  <a:extLst>
+    <a:ext uri="{05A4C25C-085E-4340-85A3-A5531E510DB2}">
+      <thm15:themeFamily xmlns:thm15="http://schemas.microsoft.com/office/thememl/2012/main" name="Office Theme" id="{62F939B6-93AF-4DB8-9C6B-D6C7DFDC589F}" vid="{4A3C46E8-61CC-4603-A589-7422A47A8E4A}"/>
+    </a:ext>
+  </a:extLst>
+</a:theme>
+</file>
+
+<file path=ppt/theme/theme2.xml><?xml version="1.0" encoding="utf-8"?>
+<a:theme xmlns:a="http://schemas.openxmlformats.org/drawingml/2006/main" name="Office Theme">
+  <a:themeElements>
+    <a:clrScheme name="Office">
+      <a:dk1>
+        <a:sysClr val="windowText" lastClr="000000"/>
+      </a:dk1>
+      <a:lt1>
+        <a:sysClr val="window" lastClr="FFFFFF"/>
+      </a:lt1>
+      <a:dk2>
+        <a:srgbClr val="44546A"/>
+      </a:dk2>
+      <a:lt2>
+        <a:srgbClr val="E7E6E6"/>
+      </a:lt2>
+      <a:accent1>
+        <a:srgbClr val="4472C4"/>
+      </a:accent1>
+      <a:accent2>
+        <a:srgbClr val="ED7D31"/>
+      </a:accent2>
+      <a:accent3>
+        <a:srgbClr val="A5A5A5"/>
+      </a:accent3>
+      <a:accent4>
+        <a:srgbClr val="FFC000"/>
+      </a:accent4>
+      <a:accent5>
+        <a:srgbClr val="5B9BD5"/>
+      </a:accent5>
+      <a:accent6>
+        <a:srgbClr val="70AD47"/>
+      </a:accent6>
+      <a:hlink>
+        <a:srgbClr val="0563C1"/>
+      </a:hlink>
+      <a:folHlink>
+        <a:srgbClr val="954F72"/>
+      </a:folHlink>
+    </a:clrScheme>
+    <a:fontScheme name="Office">
+      <a:majorFont>
+        <a:latin typeface="Calibri Light"/>
+        <a:ea typeface=""/>
+        <a:cs typeface=""/>
+        <a:font script="Jpan" typeface="游ゴシック Light"/>
+        <a:font script="Hang" typeface="맑은 고딕"/>
+        <a:font script="Hans" typeface="等线 Light"/>
+        <a:font script="Hant" typeface="新細明體"/>
+        <a:font script="Arab" typeface="Times New Roman"/>
+        <a:font script="Hebr" typeface="Times New Roman"/>
+        <a:font script="Thai" typeface="Angsana New"/>
+        <a:font script="Ethi" typeface="Nyala"/>
+        <a:font script="Beng" typeface="Vrinda"/>
+        <a:font script="Gujr" typeface="Shruti"/>
+        <a:font script="Khmr" typeface="MoolBoran"/>
+        <a:font script="Knda" typeface="Tunga"/>
+        <a:font script="Guru" typeface="Raavi"/>
+        <a:font script="Cans" typeface="Euphemia"/>
+        <a:font script="Cher" typeface="Plantagenet Cherokee"/>
+        <a:font script="Yiii" typeface="Microsoft Yi Baiti"/>
+        <a:font script="Tibt" typeface="Microsoft Himalaya"/>
+        <a:font script="Thaa" typeface="MV Boli"/>
+        <a:font script="Deva" typeface="Mangal"/>
+        <a:font script="Telu" typeface="Gautami"/>
+        <a:font script="Taml" typeface="Latha"/>
+        <a:font script="Syrc" typeface="Estrangelo Edessa"/>
+        <a:font script="Orya" typeface="Kalinga"/>
+        <a:font script="Mlym" typeface="Kartika"/>
+        <a:font script="Laoo" typeface="DokChampa"/>
+        <a:font script="Sinh" typeface="Iskoola Pota"/>
+        <a:font script="Mong" typeface="Mongolian Baiti"/>
+        <a:font script="Viet" typeface="Times New Roman"/>
+        <a:font script="Uigh" typeface="Microsoft Uighur"/>
+        <a:font script="Geor" typeface="Sylfaen"/>
+      </a:majorFont>
+      <a:minorFont>
+        <a:latin typeface="Calibri"/>
+        <a:ea typeface=""/>
+        <a:cs typeface=""/>
+        <a:font script="Jpan" typeface="游ゴシック"/>
+        <a:font script="Hang" typeface="맑은 고딕"/>
+        <a:font script="Hans" typeface="等线"/>
+        <a:font script="Hant" typeface="新細明體"/>
+        <a:font script="Arab" typeface="Arial"/>
+        <a:font script="Hebr" typeface="Arial"/>
+        <a:font script="Thai" typeface="Cordia New"/>
+        <a:font script="Ethi" typeface="Nyala"/>
+        <a:font script="Beng" typeface="Vrinda"/>
+        <a:font script="Gujr" typeface="Shruti"/>
+        <a:font script="Khmr" typeface="DaunPenh"/>
+        <a:font script="Knda" typeface="Tunga"/>
+        <a:font script="Guru" typeface="Raavi"/>
+        <a:font script="Cans" typeface="Euphemia"/>
+        <a:font script="Cher" typeface="Plantagenet Cherokee"/>
+        <a:font script="Yiii" typeface="Microsoft Yi Baiti"/>
+        <a:font script="Tibt" typeface="Microsoft Himalaya"/>
+        <a:font script="Thaa" typeface="MV Boli"/>
+        <a:font script="Deva" typeface="Mangal"/>
+        <a:font script="Telu" typeface="Gautami"/>
+        <a:font script="Taml" typeface="Latha"/>
+        <a:font script="Syrc" typeface="Estrangelo Edessa"/>
+        <a:font script="Orya" typeface="Kalinga"/>
+        <a:font script="Mlym" typeface="Kartika"/>
+        <a:font script="Laoo" typeface="DokChampa"/>
+        <a:font script="Sinh" typeface="Iskoola Pota"/>
+        <a:font script="Mong" typeface="Mongolian Baiti"/>
+        <a:font script="Viet" typeface="Arial"/>
+        <a:font script="Uigh" typeface="Microsoft Uighur"/>
+        <a:font script="Geor" typeface="Sylfaen"/>
+      </a:minorFont>
+    </a:fontScheme>
+    <a:fmtScheme name="Office">
+      <a:fillStyleLst>
+        <a:solidFill>
+          <a:schemeClr val="phClr"/>
+        </a:solidFill>
+        <a:gradFill rotWithShape="1">
+          <a:gsLst>
+            <a:gs pos="0">
+              <a:schemeClr val="phClr">
+                <a:lumMod val="110000"/>
+                <a:satMod val="105000"/>
+                <a:tint val="67000"/>
+              </a:schemeClr>
+            </a:gs>
+            <a:gs pos="50000">
+              <a:schemeClr val="phClr">
+                <a:lumMod val="105000"/>
+                <a:satMod val="103000"/>
+                <a:tint val="73000"/>
+              </a:schemeClr>
+            </a:gs>
+            <a:gs pos="100000">
+              <a:schemeClr val="phClr">
+                <a:lumMod val="105000"/>
+                <a:satMod val="109000"/>
+                <a:tint val="81000"/>
+              </a:schemeClr>
+            </a:gs>
+          </a:gsLst>
+          <a:lin ang="5400000" scaled="0"/>
+        </a:gradFill>
+        <a:gradFill rotWithShape="1">
+          <a:gsLst>
+            <a:gs pos="0">
+              <a:schemeClr val="phClr">
+                <a:satMod val="103000"/>
+                <a:lumMod val="102000"/>
+                <a:tint val="94000"/>
+              </a:schemeClr>
+            </a:gs>
+            <a:gs pos="50000">
+              <a:schemeClr val="phClr">
+                <a:satMod val="110000"/>
+                <a:lumMod val="100000"/>
+                <a:shade val="100000"/>
+              </a:schemeClr>
+            </a:gs>
+            <a:gs pos="100000">
+              <a:schemeClr val="phClr">
+                <a:lumMod val="99000"/>
+                <a:satMod val="120000"/>
+                <a:shade val="78000"/>
+              </a:schemeClr>
+            </a:gs>
+          </a:gsLst>
+          <a:lin ang="5400000" scaled="0"/>
+        </a:gradFill>
+      </a:fillStyleLst>
+      <a:lnStyleLst>
+        <a:ln w="6350" cap="flat" cmpd="sng" algn="ctr">
+          <a:solidFill>
+            <a:schemeClr val="phClr"/>
+          </a:solidFill>
+          <a:prstDash val="solid"/>
+          <a:miter lim="800000"/>
+        </a:ln>
+        <a:ln w="12700" cap="flat" cmpd="sng" algn="ctr">
+          <a:solidFill>
+            <a:schemeClr val="phClr"/>
+          </a:solidFill>
+          <a:prstDash val="solid"/>
+          <a:miter lim="800000"/>
+        </a:ln>
+        <a:ln w="19050" cap="flat" cmpd="sng" algn="ctr">
+          <a:solidFill>
+            <a:schemeClr val="phClr"/>
+          </a:solidFill>
+          <a:prstDash val="solid"/>
+          <a:miter lim="800000"/>
+        </a:ln>
+      </a:lnStyleLst>
+      <a:effectStyleLst>
+        <a:effectStyle>
+          <a:effectLst/>
+        </a:effectStyle>
+        <a:effectStyle>
+          <a:effectLst/>
+        </a:effectStyle>
+        <a:effectStyle>
+          <a:effectLst>
+            <a:outerShdw blurRad="57150" dist="19050" dir="5400000" algn="ctr" rotWithShape="0">
+              <a:srgbClr val="000000">
+                <a:alpha val="63000"/>
+              </a:srgbClr>
+            </a:outerShdw>
+          </a:effectLst>
+        </a:effectStyle>
+      </a:effectStyleLst>
+      <a:bgFillStyleLst>
+        <a:solidFill>
+          <a:schemeClr val="phClr"/>
+        </a:solidFill>
+        <a:solidFill>
+          <a:schemeClr val="phClr">
+            <a:tint val="95000"/>
+            <a:satMod val="170000"/>
+          </a:schemeClr>
+        </a:solidFill>
+        <a:gradFill rotWithShape="1">
+          <a:gsLst>
+            <a:gs pos="0">
+              <a:schemeClr val="phClr">
+                <a:tint val="93000"/>
+                <a:satMod val="150000"/>
+                <a:shade val="98000"/>
+                <a:lumMod val="102000"/>
+              </a:schemeClr>
+            </a:gs>
+            <a:gs pos="50000">
+              <a:schemeClr val="phClr">
+                <a:tint val="98000"/>
+                <a:satMod val="130000"/>
+                <a:shade val="90000"/>
+                <a:lumMod val="103000"/>
+              </a:schemeClr>
+            </a:gs>
+            <a:gs pos="100000">
+              <a:schemeClr val="phClr">
+                <a:shade val="63000"/>
+                <a:satMod val="120000"/>
+              </a:schemeClr>
+            </a:gs>
+          </a:gsLst>
+          <a:lin ang="5400000" scaled="0"/>
+        </a:gradFill>
+      </a:bgFillStyleLst>
+    </a:fmtScheme>
+  </a:themeElements>
   <a:extLst>
     <a:ext uri="{05A4C25C-085E-4340-85A3-A5531E510DB2}">
       <thm15:themeFamily xmlns:thm15="http://schemas.microsoft.com/office/thememl/2012/main" name="Office Theme" id="{62F939B6-93AF-4DB8-9C6B-D6C7DFDC589F}" vid="{4A3C46E8-61CC-4603-A589-7422A47A8E4A}"/>
